--- a/tutor-time/fuel-and-focus/downloads/Fuel_and_Focus_Lesson_1.pptx
+++ b/tutor-time/fuel-and-focus/downloads/Fuel_and_Focus_Lesson_1.pptx
@@ -4952,7 +4952,7 @@
                 </a:solidFill>
                 <a:latin typeface="Karla"/>
               </a:rPr>
-              <a:t>The label sheet has all six. Everything you need is in two columns of it.</a:t>
+              <a:t>The label sheet has all six snacks, and everything you need to score them.</a:t>
             </a:r>
           </a:p>
         </p:txBody>
@@ -17813,7 +17813,7 @@
                 </a:solidFill>
                 <a:latin typeface="Karla"/>
               </a:rPr>
-              <a:t>Two out of four will do. Four out of four gets you to lunch.</a:t>
+              <a:t>Two out of four helps. All four gets you to lunch.</a:t>
             </a:r>
           </a:p>
         </p:txBody>

--- a/tutor-time/fuel-and-focus/downloads/Fuel_and_Focus_Lesson_1.pptx
+++ b/tutor-time/fuel-and-focus/downloads/Fuel_and_Focus_Lesson_1.pptx
@@ -3208,7 +3208,7 @@
                 <a:solidFill>
                   <a:srgbClr val="256B4A"/>
                 </a:solidFill>
-                <a:latin typeface="Karla"/>
+                <a:latin typeface="Calibri"/>
               </a:rPr>
               <a:t>FUEL AND FOCUS  ·  LESSON 1 OF 3</a:t>
             </a:r>
@@ -3246,11 +3246,11 @@
               </a:spcAft>
             </a:pPr>
             <a:r>
-              <a:rPr sz="3400" b="1" i="0">
+              <a:rPr sz="3400" b="0" i="0">
                 <a:solidFill>
                   <a:srgbClr val="256B4A"/>
                 </a:solidFill>
-                <a:latin typeface="Libre Caslon Display"/>
+                <a:latin typeface="Georgia"/>
               </a:rPr>
               <a:t>Why you crash at two o’clock</a:t>
             </a:r>
@@ -3336,7 +3336,7 @@
                 <a:solidFill>
                   <a:srgbClr val="5F6B64"/>
                 </a:solidFill>
-                <a:latin typeface="Karla"/>
+                <a:latin typeface="Calibri"/>
               </a:rPr>
               <a:t>Your brain is two per cent of you and burns a fifth of your energy.</a:t>
             </a:r>
@@ -3346,7 +3346,7 @@
                 <a:solidFill>
                   <a:srgbClr val="5F6B64"/>
                 </a:solidFill>
-                <a:latin typeface="Karla"/>
+                <a:latin typeface="Calibri"/>
               </a:rPr>
               <a:t>What you eat at break decides how your afternoon goes.</a:t>
             </a:r>
@@ -3388,7 +3388,7 @@
                 <a:solidFill>
                   <a:srgbClr val="98A29B"/>
                 </a:solidFill>
-                <a:latin typeface="Karla"/>
+                <a:latin typeface="Calibri"/>
               </a:rPr>
               <a:t>Healthy Body, Healthy Mind</a:t>
             </a:r>
@@ -3454,7 +3454,7 @@
                 <a:solidFill>
                   <a:srgbClr val="98A29B"/>
                 </a:solidFill>
-                <a:latin typeface="Karla"/>
+                <a:latin typeface="Calibri"/>
               </a:rPr>
               <a:t>The Pastoral Guide</a:t>
             </a:r>
@@ -3496,7 +3496,7 @@
                 <a:solidFill>
                   <a:srgbClr val="98A29B"/>
                 </a:solidFill>
-                <a:latin typeface="Karla"/>
+                <a:latin typeface="Calibri"/>
               </a:rPr>
               <a:t>1 / 18</a:t>
             </a:r>
@@ -3600,97 +3600,9 @@
                 <a:solidFill>
                   <a:srgbClr val="256B4A"/>
                 </a:solidFill>
-                <a:latin typeface="Karla"/>
+                <a:latin typeface="Calibri"/>
               </a:rPr>
               <a:t>ON YOUR SHEET</a:t>
-            </a:r>
-          </a:p>
-        </p:txBody>
-      </p:sp>
-      <p:sp>
-        <p:nvSpPr>
-          <p:cNvPr id="4" name="Rounded Rectangle 3"/>
-          <p:cNvSpPr/>
-          <p:nvPr/>
-        </p:nvSpPr>
-        <p:spPr>
-          <a:xfrm>
-            <a:off x="7086600" y="530352"/>
-            <a:ext cx="1371600" cy="347472"/>
-          </a:xfrm>
-          <a:prstGeom prst="roundRect">
-            <a:avLst>
-              <a:gd name="adj" fmla="val 50000"/>
-            </a:avLst>
-          </a:prstGeom>
-          <a:solidFill>
-            <a:srgbClr val="EEF3F1"/>
-          </a:solidFill>
-          <a:ln>
-            <a:noFill/>
-          </a:ln>
-          <a:effectLst/>
-        </p:spPr>
-        <p:style>
-          <a:lnRef idx="1">
-            <a:schemeClr val="accent1"/>
-          </a:lnRef>
-          <a:fillRef idx="3">
-            <a:schemeClr val="accent1"/>
-          </a:fillRef>
-          <a:effectRef idx="2">
-            <a:schemeClr val="accent1"/>
-          </a:effectRef>
-          <a:fontRef idx="minor">
-            <a:schemeClr val="lt1"/>
-          </a:fontRef>
-        </p:style>
-        <p:txBody>
-          <a:bodyPr rtlCol="0" anchor="ctr"/>
-          <a:lstStyle/>
-          <a:p>
-            <a:pPr algn="ctr"/>
-          </a:p>
-        </p:txBody>
-      </p:sp>
-      <p:sp>
-        <p:nvSpPr>
-          <p:cNvPr id="5" name="TextBox 4"/>
-          <p:cNvSpPr txBox="1"/>
-          <p:nvPr/>
-        </p:nvSpPr>
-        <p:spPr>
-          <a:xfrm>
-            <a:off x="7086600" y="589788"/>
-            <a:ext cx="1371600" cy="237744"/>
-          </a:xfrm>
-          <a:prstGeom prst="rect">
-            <a:avLst/>
-          </a:prstGeom>
-          <a:noFill/>
-        </p:spPr>
-        <p:txBody>
-          <a:bodyPr wrap="square" lIns="0" rIns="0" tIns="0" bIns="0" anchor="t">
-            <a:spAutoFit/>
-          </a:bodyPr>
-          <a:lstStyle/>
-          <a:p>
-            <a:pPr algn="ctr">
-              <a:lnSpc>
-                <a:spcPct val="125000"/>
-              </a:lnSpc>
-              <a:spcAft>
-                <a:spcPts val="0"/>
-              </a:spcAft>
-            </a:pPr>
-            <a:r>
-              <a:rPr sz="1000" b="1" i="0" spc="100">
-                <a:solidFill>
-                  <a:srgbClr val="256B4A"/>
-                </a:solidFill>
-                <a:latin typeface="Karla"/>
-              </a:rPr>
-              <a:t>WRITE IT</a:t>
             </a:r>
           </a:p>
         </p:txBody>
@@ -3726,11 +3638,11 @@
               </a:spcAft>
             </a:pPr>
             <a:r>
-              <a:rPr sz="3200" b="1" i="0">
+              <a:rPr sz="3200" b="0" i="0">
                 <a:solidFill>
                   <a:srgbClr val="2C3A33"/>
                 </a:solidFill>
-                <a:latin typeface="Libre Caslon Display"/>
+                <a:latin typeface="Georgia"/>
               </a:rPr>
               <a:t>Your four criteria</a:t>
             </a:r>
@@ -3772,7 +3684,7 @@
                 <a:solidFill>
                   <a:srgbClr val="5F6B64"/>
                 </a:solidFill>
-                <a:latin typeface="Karla"/>
+                <a:latin typeface="Calibri"/>
               </a:rPr>
               <a:t>In your own words, and one line each on why it works. You need these next lesson.</a:t>
             </a:r>
@@ -3902,11 +3814,11 @@
               </a:spcAft>
             </a:pPr>
             <a:r>
-              <a:rPr sz="1200" b="1" i="0">
+              <a:rPr sz="1200" b="0" i="0">
                 <a:solidFill>
                   <a:srgbClr val="FFFDF7"/>
                 </a:solidFill>
-                <a:latin typeface="Libre Caslon Display"/>
+                <a:latin typeface="Georgia"/>
               </a:rPr>
               <a:t>1</a:t>
             </a:r>
@@ -3944,11 +3856,11 @@
               </a:spcAft>
             </a:pPr>
             <a:r>
-              <a:rPr sz="1250" b="1" i="0">
+              <a:rPr sz="1250" b="0" i="0">
                 <a:solidFill>
                   <a:srgbClr val="256B4A"/>
                 </a:solidFill>
-                <a:latin typeface="Libre Caslon Display"/>
+                <a:latin typeface="Georgia"/>
               </a:rPr>
               <a:t>Protein</a:t>
             </a:r>
@@ -4078,11 +3990,11 @@
               </a:spcAft>
             </a:pPr>
             <a:r>
-              <a:rPr sz="1200" b="1" i="0">
+              <a:rPr sz="1200" b="0" i="0">
                 <a:solidFill>
                   <a:srgbClr val="FFFDF7"/>
                 </a:solidFill>
-                <a:latin typeface="Libre Caslon Display"/>
+                <a:latin typeface="Georgia"/>
               </a:rPr>
               <a:t>2</a:t>
             </a:r>
@@ -4120,11 +4032,11 @@
               </a:spcAft>
             </a:pPr>
             <a:r>
-              <a:rPr sz="1250" b="1" i="0">
+              <a:rPr sz="1250" b="0" i="0">
                 <a:solidFill>
                   <a:srgbClr val="256B4A"/>
                 </a:solidFill>
-                <a:latin typeface="Libre Caslon Display"/>
+                <a:latin typeface="Georgia"/>
               </a:rPr>
               <a:t>Fibre</a:t>
             </a:r>
@@ -4254,11 +4166,11 @@
               </a:spcAft>
             </a:pPr>
             <a:r>
-              <a:rPr sz="1200" b="1" i="0">
+              <a:rPr sz="1200" b="0" i="0">
                 <a:solidFill>
                   <a:srgbClr val="FFFDF7"/>
                 </a:solidFill>
-                <a:latin typeface="Libre Caslon Display"/>
+                <a:latin typeface="Georgia"/>
               </a:rPr>
               <a:t>3</a:t>
             </a:r>
@@ -4296,11 +4208,11 @@
               </a:spcAft>
             </a:pPr>
             <a:r>
-              <a:rPr sz="1250" b="1" i="0">
+              <a:rPr sz="1250" b="0" i="0">
                 <a:solidFill>
                   <a:srgbClr val="256B4A"/>
                 </a:solidFill>
-                <a:latin typeface="Libre Caslon Display"/>
+                <a:latin typeface="Georgia"/>
               </a:rPr>
               <a:t>A slow carb</a:t>
             </a:r>
@@ -4430,11 +4342,11 @@
               </a:spcAft>
             </a:pPr>
             <a:r>
-              <a:rPr sz="1200" b="1" i="0">
+              <a:rPr sz="1200" b="0" i="0">
                 <a:solidFill>
                   <a:srgbClr val="FFFDF7"/>
                 </a:solidFill>
-                <a:latin typeface="Libre Caslon Display"/>
+                <a:latin typeface="Georgia"/>
               </a:rPr>
               <a:t>4</a:t>
             </a:r>
@@ -4472,11 +4384,11 @@
               </a:spcAft>
             </a:pPr>
             <a:r>
-              <a:rPr sz="1250" b="1" i="0">
+              <a:rPr sz="1250" b="0" i="0">
                 <a:solidFill>
                   <a:srgbClr val="256B4A"/>
                 </a:solidFill>
-                <a:latin typeface="Libre Caslon Display"/>
+                <a:latin typeface="Georgia"/>
               </a:rPr>
               <a:t>Healthy fats</a:t>
             </a:r>
@@ -4566,7 +4478,7 @@
                 <a:solidFill>
                   <a:srgbClr val="256B4A"/>
                 </a:solidFill>
-                <a:latin typeface="Karla"/>
+                <a:latin typeface="Calibri"/>
               </a:rPr>
               <a:t>Then add one snack you already eat that hits at least two of them.</a:t>
             </a:r>
@@ -4632,7 +4544,7 @@
                 <a:solidFill>
                   <a:srgbClr val="98A29B"/>
                 </a:solidFill>
-                <a:latin typeface="Karla"/>
+                <a:latin typeface="Calibri"/>
               </a:rPr>
               <a:t>The Pastoral Guide</a:t>
             </a:r>
@@ -4674,7 +4586,7 @@
                 <a:solidFill>
                   <a:srgbClr val="98A29B"/>
                 </a:solidFill>
-                <a:latin typeface="Karla"/>
+                <a:latin typeface="Calibri"/>
               </a:rPr>
               <a:t>10 / 18</a:t>
             </a:r>
@@ -4778,97 +4690,9 @@
                 <a:solidFill>
                   <a:srgbClr val="256B4A"/>
                 </a:solidFill>
-                <a:latin typeface="Karla"/>
+                <a:latin typeface="Calibri"/>
               </a:rPr>
               <a:t>EVIDENCE, NOT GUESSING</a:t>
-            </a:r>
-          </a:p>
-        </p:txBody>
-      </p:sp>
-      <p:sp>
-        <p:nvSpPr>
-          <p:cNvPr id="4" name="Rounded Rectangle 3"/>
-          <p:cNvSpPr/>
-          <p:nvPr/>
-        </p:nvSpPr>
-        <p:spPr>
-          <a:xfrm>
-            <a:off x="7086600" y="530352"/>
-            <a:ext cx="1371600" cy="347472"/>
-          </a:xfrm>
-          <a:prstGeom prst="roundRect">
-            <a:avLst>
-              <a:gd name="adj" fmla="val 50000"/>
-            </a:avLst>
-          </a:prstGeom>
-          <a:solidFill>
-            <a:srgbClr val="EEF3F1"/>
-          </a:solidFill>
-          <a:ln>
-            <a:noFill/>
-          </a:ln>
-          <a:effectLst/>
-        </p:spPr>
-        <p:style>
-          <a:lnRef idx="1">
-            <a:schemeClr val="accent1"/>
-          </a:lnRef>
-          <a:fillRef idx="3">
-            <a:schemeClr val="accent1"/>
-          </a:fillRef>
-          <a:effectRef idx="2">
-            <a:schemeClr val="accent1"/>
-          </a:effectRef>
-          <a:fontRef idx="minor">
-            <a:schemeClr val="lt1"/>
-          </a:fontRef>
-        </p:style>
-        <p:txBody>
-          <a:bodyPr rtlCol="0" anchor="ctr"/>
-          <a:lstStyle/>
-          <a:p>
-            <a:pPr algn="ctr"/>
-          </a:p>
-        </p:txBody>
-      </p:sp>
-      <p:sp>
-        <p:nvSpPr>
-          <p:cNvPr id="5" name="TextBox 4"/>
-          <p:cNvSpPr txBox="1"/>
-          <p:nvPr/>
-        </p:nvSpPr>
-        <p:spPr>
-          <a:xfrm>
-            <a:off x="7086600" y="589788"/>
-            <a:ext cx="1371600" cy="237744"/>
-          </a:xfrm>
-          <a:prstGeom prst="rect">
-            <a:avLst/>
-          </a:prstGeom>
-          <a:noFill/>
-        </p:spPr>
-        <p:txBody>
-          <a:bodyPr wrap="square" lIns="0" rIns="0" tIns="0" bIns="0" anchor="t">
-            <a:spAutoFit/>
-          </a:bodyPr>
-          <a:lstStyle/>
-          <a:p>
-            <a:pPr algn="ctr">
-              <a:lnSpc>
-                <a:spcPct val="125000"/>
-              </a:lnSpc>
-              <a:spcAft>
-                <a:spcPts val="0"/>
-              </a:spcAft>
-            </a:pPr>
-            <a:r>
-              <a:rPr sz="1000" b="1" i="0" spc="100">
-                <a:solidFill>
-                  <a:srgbClr val="256B4A"/>
-                </a:solidFill>
-                <a:latin typeface="Karla"/>
-              </a:rPr>
-              <a:t>LABELS</a:t>
             </a:r>
           </a:p>
         </p:txBody>
@@ -4904,11 +4728,11 @@
               </a:spcAft>
             </a:pPr>
             <a:r>
-              <a:rPr sz="2900" b="1" i="0">
+              <a:rPr sz="2900" b="0" i="0">
                 <a:solidFill>
                   <a:srgbClr val="2C3A33"/>
                 </a:solidFill>
-                <a:latin typeface="Libre Caslon Display"/>
+                <a:latin typeface="Georgia"/>
               </a:rPr>
               <a:t>What the label actually says</a:t>
             </a:r>
@@ -4950,7 +4774,7 @@
                 <a:solidFill>
                   <a:srgbClr val="5F6B64"/>
                 </a:solidFill>
-                <a:latin typeface="Karla"/>
+                <a:latin typeface="Calibri"/>
               </a:rPr>
               <a:t>The label sheet has all six snacks, and everything you need to score them.</a:t>
             </a:r>
@@ -5080,11 +4904,11 @@
               </a:spcAft>
             </a:pPr>
             <a:r>
-              <a:rPr sz="1200" b="1" i="0">
+              <a:rPr sz="1200" b="0" i="0">
                 <a:solidFill>
                   <a:srgbClr val="FFFDF7"/>
                 </a:solidFill>
-                <a:latin typeface="Libre Caslon Display"/>
+                <a:latin typeface="Georgia"/>
               </a:rPr>
               <a:t>1</a:t>
             </a:r>
@@ -5122,11 +4946,11 @@
               </a:spcAft>
             </a:pPr>
             <a:r>
-              <a:rPr sz="1300" b="1" i="0">
+              <a:rPr sz="1300" b="0" i="0">
                 <a:solidFill>
                   <a:srgbClr val="256B4A"/>
                 </a:solidFill>
-                <a:latin typeface="Libre Caslon Display"/>
+                <a:latin typeface="Georgia"/>
               </a:rPr>
               <a:t>Find the protein</a:t>
             </a:r>
@@ -5168,7 +4992,7 @@
                 <a:solidFill>
                   <a:srgbClr val="5F6B64"/>
                 </a:solidFill>
-                <a:latin typeface="Karla"/>
+                <a:latin typeface="Calibri"/>
               </a:rPr>
               <a:t>Anything over about 5g a serving is making a difference.</a:t>
             </a:r>
@@ -5298,11 +5122,11 @@
               </a:spcAft>
             </a:pPr>
             <a:r>
-              <a:rPr sz="1200" b="1" i="0">
+              <a:rPr sz="1200" b="0" i="0">
                 <a:solidFill>
                   <a:srgbClr val="FFFDF7"/>
                 </a:solidFill>
-                <a:latin typeface="Libre Caslon Display"/>
+                <a:latin typeface="Georgia"/>
               </a:rPr>
               <a:t>2</a:t>
             </a:r>
@@ -5340,11 +5164,11 @@
               </a:spcAft>
             </a:pPr>
             <a:r>
-              <a:rPr sz="1300" b="1" i="0">
+              <a:rPr sz="1300" b="0" i="0">
                 <a:solidFill>
                   <a:srgbClr val="256B4A"/>
                 </a:solidFill>
-                <a:latin typeface="Libre Caslon Display"/>
+                <a:latin typeface="Georgia"/>
               </a:rPr>
               <a:t>Find the fibre</a:t>
             </a:r>
@@ -5386,7 +5210,7 @@
                 <a:solidFill>
                   <a:srgbClr val="5F6B64"/>
                 </a:solidFill>
-                <a:latin typeface="Karla"/>
+                <a:latin typeface="Calibri"/>
               </a:rPr>
               <a:t>Over about 3g a serving and it will slow things down.</a:t>
             </a:r>
@@ -5516,11 +5340,11 @@
               </a:spcAft>
             </a:pPr>
             <a:r>
-              <a:rPr sz="1200" b="1" i="0">
+              <a:rPr sz="1200" b="0" i="0">
                 <a:solidFill>
                   <a:srgbClr val="FFFDF7"/>
                 </a:solidFill>
-                <a:latin typeface="Libre Caslon Display"/>
+                <a:latin typeface="Georgia"/>
               </a:rPr>
               <a:t>3</a:t>
             </a:r>
@@ -5558,11 +5382,11 @@
               </a:spcAft>
             </a:pPr>
             <a:r>
-              <a:rPr sz="1300" b="1" i="0">
+              <a:rPr sz="1300" b="0" i="0">
                 <a:solidFill>
                   <a:srgbClr val="256B4A"/>
                 </a:solidFill>
-                <a:latin typeface="Libre Caslon Display"/>
+                <a:latin typeface="Georgia"/>
               </a:rPr>
               <a:t>Check the carb</a:t>
             </a:r>
@@ -5604,7 +5428,7 @@
                 <a:solidFill>
                   <a:srgbClr val="5F6B64"/>
                 </a:solidFill>
-                <a:latin typeface="Karla"/>
+                <a:latin typeface="Calibri"/>
               </a:rPr>
               <a:t>Wholegrain, oats or whole fruit is slow. White or sugary is fast.</a:t>
             </a:r>
@@ -5734,11 +5558,11 @@
               </a:spcAft>
             </a:pPr>
             <a:r>
-              <a:rPr sz="1200" b="1" i="0">
+              <a:rPr sz="1200" b="0" i="0">
                 <a:solidFill>
                   <a:srgbClr val="FFFDF7"/>
                 </a:solidFill>
-                <a:latin typeface="Libre Caslon Display"/>
+                <a:latin typeface="Georgia"/>
               </a:rPr>
               <a:t>4</a:t>
             </a:r>
@@ -5776,11 +5600,11 @@
               </a:spcAft>
             </a:pPr>
             <a:r>
-              <a:rPr sz="1300" b="1" i="0">
+              <a:rPr sz="1300" b="0" i="0">
                 <a:solidFill>
                   <a:srgbClr val="256B4A"/>
                 </a:solidFill>
-                <a:latin typeface="Libre Caslon Display"/>
+                <a:latin typeface="Georgia"/>
               </a:rPr>
               <a:t>Check where the fat is from</a:t>
             </a:r>
@@ -5822,7 +5646,7 @@
                 <a:solidFill>
                   <a:srgbClr val="5F6B64"/>
                 </a:solidFill>
-                <a:latin typeface="Karla"/>
+                <a:latin typeface="Calibri"/>
               </a:rPr>
               <a:t>Seeds, nuts, avocado and dairy count. Fried or baked in does not.</a:t>
             </a:r>
@@ -5864,7 +5688,7 @@
                 <a:solidFill>
                   <a:srgbClr val="256B4A"/>
                 </a:solidFill>
-                <a:latin typeface="Karla"/>
+                <a:latin typeface="Calibri"/>
               </a:rPr>
               <a:t>Then tick the four columns and add up the score out of four.</a:t>
             </a:r>
@@ -5930,7 +5754,7 @@
                 <a:solidFill>
                   <a:srgbClr val="98A29B"/>
                 </a:solidFill>
-                <a:latin typeface="Karla"/>
+                <a:latin typeface="Calibri"/>
               </a:rPr>
               <a:t>The Pastoral Guide</a:t>
             </a:r>
@@ -5972,7 +5796,7 @@
                 <a:solidFill>
                   <a:srgbClr val="98A29B"/>
                 </a:solidFill>
-                <a:latin typeface="Karla"/>
+                <a:latin typeface="Calibri"/>
               </a:rPr>
               <a:t>11 / 18</a:t>
             </a:r>
@@ -6076,97 +5900,9 @@
                 <a:solidFill>
                   <a:srgbClr val="CBDFD6"/>
                 </a:solidFill>
-                <a:latin typeface="Karla"/>
+                <a:latin typeface="Calibri"/>
               </a:rPr>
               <a:t>NUMBERS UP</a:t>
-            </a:r>
-          </a:p>
-        </p:txBody>
-      </p:sp>
-      <p:sp>
-        <p:nvSpPr>
-          <p:cNvPr id="4" name="Rounded Rectangle 3"/>
-          <p:cNvSpPr/>
-          <p:nvPr/>
-        </p:nvSpPr>
-        <p:spPr>
-          <a:xfrm>
-            <a:off x="7086600" y="530352"/>
-            <a:ext cx="1371600" cy="347472"/>
-          </a:xfrm>
-          <a:prstGeom prst="roundRect">
-            <a:avLst>
-              <a:gd name="adj" fmla="val 50000"/>
-            </a:avLst>
-          </a:prstGeom>
-          <a:solidFill>
-            <a:srgbClr val="FFFDF7"/>
-          </a:solidFill>
-          <a:ln>
-            <a:noFill/>
-          </a:ln>
-          <a:effectLst/>
-        </p:spPr>
-        <p:style>
-          <a:lnRef idx="1">
-            <a:schemeClr val="accent1"/>
-          </a:lnRef>
-          <a:fillRef idx="3">
-            <a:schemeClr val="accent1"/>
-          </a:fillRef>
-          <a:effectRef idx="2">
-            <a:schemeClr val="accent1"/>
-          </a:effectRef>
-          <a:fontRef idx="minor">
-            <a:schemeClr val="lt1"/>
-          </a:fontRef>
-        </p:style>
-        <p:txBody>
-          <a:bodyPr rtlCol="0" anchor="ctr"/>
-          <a:lstStyle/>
-          <a:p>
-            <a:pPr algn="ctr"/>
-          </a:p>
-        </p:txBody>
-      </p:sp>
-      <p:sp>
-        <p:nvSpPr>
-          <p:cNvPr id="5" name="TextBox 4"/>
-          <p:cNvSpPr txBox="1"/>
-          <p:nvPr/>
-        </p:nvSpPr>
-        <p:spPr>
-          <a:xfrm>
-            <a:off x="7086600" y="589788"/>
-            <a:ext cx="1371600" cy="237744"/>
-          </a:xfrm>
-          <a:prstGeom prst="rect">
-            <a:avLst/>
-          </a:prstGeom>
-          <a:noFill/>
-        </p:spPr>
-        <p:txBody>
-          <a:bodyPr wrap="square" lIns="0" rIns="0" tIns="0" bIns="0" anchor="t">
-            <a:spAutoFit/>
-          </a:bodyPr>
-          <a:lstStyle/>
-          <a:p>
-            <a:pPr algn="ctr">
-              <a:lnSpc>
-                <a:spcPct val="125000"/>
-              </a:lnSpc>
-              <a:spcAft>
-                <a:spcPts val="0"/>
-              </a:spcAft>
-            </a:pPr>
-            <a:r>
-              <a:rPr sz="1000" b="1" i="0" spc="100">
-                <a:solidFill>
-                  <a:srgbClr val="256B4A"/>
-                </a:solidFill>
-                <a:latin typeface="Karla"/>
-              </a:rPr>
-              <a:t>COMPARE</a:t>
             </a:r>
           </a:p>
         </p:txBody>
@@ -6202,11 +5938,11 @@
               </a:spcAft>
             </a:pPr>
             <a:r>
-              <a:rPr sz="3000" b="1" i="0">
+              <a:rPr sz="3000" b="0" i="0">
                 <a:solidFill>
                   <a:srgbClr val="FFFDF7"/>
                 </a:solidFill>
-                <a:latin typeface="Libre Caslon Display"/>
+                <a:latin typeface="Georgia"/>
               </a:rPr>
               <a:t>Two things that catch people out</a:t>
             </a:r>
@@ -6292,11 +6028,11 @@
               </a:spcAft>
             </a:pPr>
             <a:r>
-              <a:rPr sz="1500" b="1" i="0">
+              <a:rPr sz="1500" b="0" i="0">
                 <a:solidFill>
                   <a:srgbClr val="256B4A"/>
                 </a:solidFill>
-                <a:latin typeface="Libre Caslon Display"/>
+                <a:latin typeface="Georgia"/>
               </a:rPr>
               <a:t>The banana has more sugar than the crisps.</a:t>
             </a:r>
@@ -6338,7 +6074,7 @@
                 <a:solidFill>
                   <a:srgbClr val="5F6B64"/>
                 </a:solidFill>
-                <a:latin typeface="Karla"/>
+                <a:latin typeface="Calibri"/>
               </a:rPr>
               <a:t>And it still gets you further. Your criteria explain why.</a:t>
             </a:r>
@@ -6424,11 +6160,11 @@
               </a:spcAft>
             </a:pPr>
             <a:r>
-              <a:rPr sz="1500" b="1" i="0">
+              <a:rPr sz="1500" b="0" i="0">
                 <a:solidFill>
                   <a:srgbClr val="256B4A"/>
                 </a:solidFill>
-                <a:latin typeface="Libre Caslon Display"/>
+                <a:latin typeface="Georgia"/>
               </a:rPr>
               <a:t>The crisps have plenty of fat, and it is not helping.</a:t>
             </a:r>
@@ -6470,7 +6206,7 @@
                 <a:solidFill>
                   <a:srgbClr val="5F6B64"/>
                 </a:solidFill>
-                <a:latin typeface="Karla"/>
+                <a:latin typeface="Calibri"/>
               </a:rPr>
               <a:t>It is fried in, and that is not the same as fat from seeds, nuts or avocado.</a:t>
             </a:r>
@@ -6512,7 +6248,7 @@
                 <a:solidFill>
                   <a:srgbClr val="FFFDF7"/>
                 </a:solidFill>
-                <a:latin typeface="Karla"/>
+                <a:latin typeface="Calibri"/>
               </a:rPr>
               <a:t>The sugar on its own tells you very little. What matters is what comes with it.</a:t>
             </a:r>
@@ -6578,7 +6314,7 @@
                 <a:solidFill>
                   <a:srgbClr val="CBDFD6"/>
                 </a:solidFill>
-                <a:latin typeface="Karla"/>
+                <a:latin typeface="Calibri"/>
               </a:rPr>
               <a:t>The Pastoral Guide</a:t>
             </a:r>
@@ -6620,7 +6356,7 @@
                 <a:solidFill>
                   <a:srgbClr val="CBDFD6"/>
                 </a:solidFill>
-                <a:latin typeface="Karla"/>
+                <a:latin typeface="Calibri"/>
               </a:rPr>
               <a:t>12 / 18</a:t>
             </a:r>
@@ -6724,97 +6460,9 @@
                 <a:solidFill>
                   <a:srgbClr val="256B4A"/>
                 </a:solidFill>
-                <a:latin typeface="Karla"/>
+                <a:latin typeface="Calibri"/>
               </a:rPr>
               <a:t>BACK TO THE SIX CARDS</a:t>
-            </a:r>
-          </a:p>
-        </p:txBody>
-      </p:sp>
-      <p:sp>
-        <p:nvSpPr>
-          <p:cNvPr id="4" name="Rounded Rectangle 3"/>
-          <p:cNvSpPr/>
-          <p:nvPr/>
-        </p:nvSpPr>
-        <p:spPr>
-          <a:xfrm>
-            <a:off x="7086600" y="530352"/>
-            <a:ext cx="1371600" cy="347472"/>
-          </a:xfrm>
-          <a:prstGeom prst="roundRect">
-            <a:avLst>
-              <a:gd name="adj" fmla="val 50000"/>
-            </a:avLst>
-          </a:prstGeom>
-          <a:solidFill>
-            <a:srgbClr val="EEF3F1"/>
-          </a:solidFill>
-          <a:ln>
-            <a:noFill/>
-          </a:ln>
-          <a:effectLst/>
-        </p:spPr>
-        <p:style>
-          <a:lnRef idx="1">
-            <a:schemeClr val="accent1"/>
-          </a:lnRef>
-          <a:fillRef idx="3">
-            <a:schemeClr val="accent1"/>
-          </a:fillRef>
-          <a:effectRef idx="2">
-            <a:schemeClr val="accent1"/>
-          </a:effectRef>
-          <a:fontRef idx="minor">
-            <a:schemeClr val="lt1"/>
-          </a:fontRef>
-        </p:style>
-        <p:txBody>
-          <a:bodyPr rtlCol="0" anchor="ctr"/>
-          <a:lstStyle/>
-          <a:p>
-            <a:pPr algn="ctr"/>
-          </a:p>
-        </p:txBody>
-      </p:sp>
-      <p:sp>
-        <p:nvSpPr>
-          <p:cNvPr id="5" name="TextBox 4"/>
-          <p:cNvSpPr txBox="1"/>
-          <p:nvPr/>
-        </p:nvSpPr>
-        <p:spPr>
-          <a:xfrm>
-            <a:off x="7086600" y="589788"/>
-            <a:ext cx="1371600" cy="237744"/>
-          </a:xfrm>
-          <a:prstGeom prst="rect">
-            <a:avLst/>
-          </a:prstGeom>
-          <a:noFill/>
-        </p:spPr>
-        <p:txBody>
-          <a:bodyPr wrap="square" lIns="0" rIns="0" tIns="0" bIns="0" anchor="t">
-            <a:spAutoFit/>
-          </a:bodyPr>
-          <a:lstStyle/>
-          <a:p>
-            <a:pPr algn="ctr">
-              <a:lnSpc>
-                <a:spcPct val="125000"/>
-              </a:lnSpc>
-              <a:spcAft>
-                <a:spcPts val="0"/>
-              </a:spcAft>
-            </a:pPr>
-            <a:r>
-              <a:rPr sz="1000" b="1" i="0" spc="100">
-                <a:solidFill>
-                  <a:srgbClr val="256B4A"/>
-                </a:solidFill>
-                <a:latin typeface="Karla"/>
-              </a:rPr>
-              <a:t>RE-RANK</a:t>
             </a:r>
           </a:p>
         </p:txBody>
@@ -6850,11 +6498,11 @@
               </a:spcAft>
             </a:pPr>
             <a:r>
-              <a:rPr sz="3200" b="1" i="0">
+              <a:rPr sz="3200" b="0" i="0">
                 <a:solidFill>
                   <a:srgbClr val="2C3A33"/>
                 </a:solidFill>
-                <a:latin typeface="Libre Caslon Display"/>
+                <a:latin typeface="Georgia"/>
               </a:rPr>
               <a:t>Rank them again</a:t>
             </a:r>
@@ -6896,7 +6544,7 @@
                 <a:solidFill>
                   <a:srgbClr val="5F6B64"/>
                 </a:solidFill>
-                <a:latin typeface="Karla"/>
+                <a:latin typeface="Calibri"/>
               </a:rPr>
               <a:t>Same six snacks, but now you have the numbers. Score each out of four, then reorder.</a:t>
             </a:r>
@@ -6986,7 +6634,7 @@
                 <a:solidFill>
                   <a:srgbClr val="2C3A33"/>
                 </a:solidFill>
-                <a:latin typeface="Karla"/>
+                <a:latin typeface="Calibri"/>
               </a:rPr>
               <a:t>Which one moved the most?</a:t>
             </a:r>
@@ -7076,7 +6724,7 @@
                 <a:solidFill>
                   <a:srgbClr val="2C3A33"/>
                 </a:solidFill>
-                <a:latin typeface="Karla"/>
+                <a:latin typeface="Calibri"/>
               </a:rPr>
               <a:t>Which one did you defend at the start and would drop now?</a:t>
             </a:r>
@@ -7166,7 +6814,7 @@
                 <a:solidFill>
                   <a:srgbClr val="2C3A33"/>
                 </a:solidFill>
-                <a:latin typeface="Karla"/>
+                <a:latin typeface="Calibri"/>
               </a:rPr>
               <a:t>Which one is nearly there, and what would fix it?</a:t>
             </a:r>
@@ -7208,7 +6856,7 @@
                 <a:solidFill>
                   <a:srgbClr val="256B4A"/>
                 </a:solidFill>
-                <a:latin typeface="Karla"/>
+                <a:latin typeface="Calibri"/>
               </a:rPr>
               <a:t>The last question matters most, because almost any snack can be fixed by adding one thing to it.</a:t>
             </a:r>
@@ -7274,7 +6922,7 @@
                 <a:solidFill>
                   <a:srgbClr val="98A29B"/>
                 </a:solidFill>
-                <a:latin typeface="Karla"/>
+                <a:latin typeface="Calibri"/>
               </a:rPr>
               <a:t>The Pastoral Guide</a:t>
             </a:r>
@@ -7316,7 +6964,7 @@
                 <a:solidFill>
                   <a:srgbClr val="98A29B"/>
                 </a:solidFill>
-                <a:latin typeface="Karla"/>
+                <a:latin typeface="Calibri"/>
               </a:rPr>
               <a:t>13 / 18</a:t>
             </a:r>
@@ -7420,97 +7068,9 @@
                 <a:solidFill>
                   <a:srgbClr val="CBDFD6"/>
                 </a:solidFill>
-                <a:latin typeface="Karla"/>
+                <a:latin typeface="Calibri"/>
               </a:rPr>
               <a:t>TO BE CLEAR</a:t>
-            </a:r>
-          </a:p>
-        </p:txBody>
-      </p:sp>
-      <p:sp>
-        <p:nvSpPr>
-          <p:cNvPr id="4" name="Rounded Rectangle 3"/>
-          <p:cNvSpPr/>
-          <p:nvPr/>
-        </p:nvSpPr>
-        <p:spPr>
-          <a:xfrm>
-            <a:off x="7086600" y="530352"/>
-            <a:ext cx="1371600" cy="347472"/>
-          </a:xfrm>
-          <a:prstGeom prst="roundRect">
-            <a:avLst>
-              <a:gd name="adj" fmla="val 50000"/>
-            </a:avLst>
-          </a:prstGeom>
-          <a:solidFill>
-            <a:srgbClr val="FFFDF7"/>
-          </a:solidFill>
-          <a:ln>
-            <a:noFill/>
-          </a:ln>
-          <a:effectLst/>
-        </p:spPr>
-        <p:style>
-          <a:lnRef idx="1">
-            <a:schemeClr val="accent1"/>
-          </a:lnRef>
-          <a:fillRef idx="3">
-            <a:schemeClr val="accent1"/>
-          </a:fillRef>
-          <a:effectRef idx="2">
-            <a:schemeClr val="accent1"/>
-          </a:effectRef>
-          <a:fontRef idx="minor">
-            <a:schemeClr val="lt1"/>
-          </a:fontRef>
-        </p:style>
-        <p:txBody>
-          <a:bodyPr rtlCol="0" anchor="ctr"/>
-          <a:lstStyle/>
-          <a:p>
-            <a:pPr algn="ctr"/>
-          </a:p>
-        </p:txBody>
-      </p:sp>
-      <p:sp>
-        <p:nvSpPr>
-          <p:cNvPr id="5" name="TextBox 4"/>
-          <p:cNvSpPr txBox="1"/>
-          <p:nvPr/>
-        </p:nvSpPr>
-        <p:spPr>
-          <a:xfrm>
-            <a:off x="7086600" y="589788"/>
-            <a:ext cx="1371600" cy="237744"/>
-          </a:xfrm>
-          <a:prstGeom prst="rect">
-            <a:avLst/>
-          </a:prstGeom>
-          <a:noFill/>
-        </p:spPr>
-        <p:txBody>
-          <a:bodyPr wrap="square" lIns="0" rIns="0" tIns="0" bIns="0" anchor="t">
-            <a:spAutoFit/>
-          </a:bodyPr>
-          <a:lstStyle/>
-          <a:p>
-            <a:pPr algn="ctr">
-              <a:lnSpc>
-                <a:spcPct val="125000"/>
-              </a:lnSpc>
-              <a:spcAft>
-                <a:spcPts val="0"/>
-              </a:spcAft>
-            </a:pPr>
-            <a:r>
-              <a:rPr sz="1000" b="1" i="0" spc="100">
-                <a:solidFill>
-                  <a:srgbClr val="256B4A"/>
-                </a:solidFill>
-                <a:latin typeface="Karla"/>
-              </a:rPr>
-              <a:t>STRAIGHT</a:t>
             </a:r>
           </a:p>
         </p:txBody>
@@ -7546,11 +7106,11 @@
               </a:spcAft>
             </a:pPr>
             <a:r>
-              <a:rPr sz="3200" b="1" i="0">
+              <a:rPr sz="3200" b="0" i="0">
                 <a:solidFill>
                   <a:srgbClr val="FFFDF7"/>
                 </a:solidFill>
-                <a:latin typeface="Libre Caslon Display"/>
+                <a:latin typeface="Georgia"/>
               </a:rPr>
               <a:t>One question, not a verdict</a:t>
             </a:r>
@@ -7640,7 +7200,7 @@
                 <a:solidFill>
                   <a:srgbClr val="256B4A"/>
                 </a:solidFill>
-                <a:latin typeface="Karla"/>
+                <a:latin typeface="Calibri"/>
               </a:rPr>
               <a:t>This is not about weight, and it is not about how anybody looks.</a:t>
             </a:r>
@@ -7730,7 +7290,7 @@
                 <a:solidFill>
                   <a:srgbClr val="256B4A"/>
                 </a:solidFill>
-                <a:latin typeface="Karla"/>
+                <a:latin typeface="Calibri"/>
               </a:rPr>
               <a:t>Nobody is scoring you, and nobody is scoring your lunchbox.</a:t>
             </a:r>
@@ -7820,7 +7380,7 @@
                 <a:solidFill>
                   <a:srgbClr val="256B4A"/>
                 </a:solidFill>
-                <a:latin typeface="Karla"/>
+                <a:latin typeface="Calibri"/>
               </a:rPr>
               <a:t>One question only: what keeps you going until lunch?</a:t>
             </a:r>
@@ -7862,7 +7422,7 @@
                 <a:solidFill>
                   <a:srgbClr val="FFFDF7"/>
                 </a:solidFill>
-                <a:latin typeface="Karla"/>
+                <a:latin typeface="Calibri"/>
               </a:rPr>
               <a:t>This lesson is about energy and concentration, and nothing else.</a:t>
             </a:r>
@@ -7928,7 +7488,7 @@
                 <a:solidFill>
                   <a:srgbClr val="CBDFD6"/>
                 </a:solidFill>
-                <a:latin typeface="Karla"/>
+                <a:latin typeface="Calibri"/>
               </a:rPr>
               <a:t>The Pastoral Guide</a:t>
             </a:r>
@@ -7970,7 +7530,7 @@
                 <a:solidFill>
                   <a:srgbClr val="CBDFD6"/>
                 </a:solidFill>
-                <a:latin typeface="Karla"/>
+                <a:latin typeface="Calibri"/>
               </a:rPr>
               <a:t>14 / 18</a:t>
             </a:r>
@@ -8074,97 +7634,9 @@
                 <a:solidFill>
                   <a:srgbClr val="256B4A"/>
                 </a:solidFill>
-                <a:latin typeface="Karla"/>
+                <a:latin typeface="Calibri"/>
               </a:rPr>
               <a:t>TALK ABOUT IT</a:t>
-            </a:r>
-          </a:p>
-        </p:txBody>
-      </p:sp>
-      <p:sp>
-        <p:nvSpPr>
-          <p:cNvPr id="4" name="Rounded Rectangle 3"/>
-          <p:cNvSpPr/>
-          <p:nvPr/>
-        </p:nvSpPr>
-        <p:spPr>
-          <a:xfrm>
-            <a:off x="7086600" y="530352"/>
-            <a:ext cx="1371600" cy="347472"/>
-          </a:xfrm>
-          <a:prstGeom prst="roundRect">
-            <a:avLst>
-              <a:gd name="adj" fmla="val 50000"/>
-            </a:avLst>
-          </a:prstGeom>
-          <a:solidFill>
-            <a:srgbClr val="EEF3F1"/>
-          </a:solidFill>
-          <a:ln>
-            <a:noFill/>
-          </a:ln>
-          <a:effectLst/>
-        </p:spPr>
-        <p:style>
-          <a:lnRef idx="1">
-            <a:schemeClr val="accent1"/>
-          </a:lnRef>
-          <a:fillRef idx="3">
-            <a:schemeClr val="accent1"/>
-          </a:fillRef>
-          <a:effectRef idx="2">
-            <a:schemeClr val="accent1"/>
-          </a:effectRef>
-          <a:fontRef idx="minor">
-            <a:schemeClr val="lt1"/>
-          </a:fontRef>
-        </p:style>
-        <p:txBody>
-          <a:bodyPr rtlCol="0" anchor="ctr"/>
-          <a:lstStyle/>
-          <a:p>
-            <a:pPr algn="ctr"/>
-          </a:p>
-        </p:txBody>
-      </p:sp>
-      <p:sp>
-        <p:nvSpPr>
-          <p:cNvPr id="5" name="TextBox 4"/>
-          <p:cNvSpPr txBox="1"/>
-          <p:nvPr/>
-        </p:nvSpPr>
-        <p:spPr>
-          <a:xfrm>
-            <a:off x="7086600" y="589788"/>
-            <a:ext cx="1371600" cy="237744"/>
-          </a:xfrm>
-          <a:prstGeom prst="rect">
-            <a:avLst/>
-          </a:prstGeom>
-          <a:noFill/>
-        </p:spPr>
-        <p:txBody>
-          <a:bodyPr wrap="square" lIns="0" rIns="0" tIns="0" bIns="0" anchor="t">
-            <a:spAutoFit/>
-          </a:bodyPr>
-          <a:lstStyle/>
-          <a:p>
-            <a:pPr algn="ctr">
-              <a:lnSpc>
-                <a:spcPct val="125000"/>
-              </a:lnSpc>
-              <a:spcAft>
-                <a:spcPts val="0"/>
-              </a:spcAft>
-            </a:pPr>
-            <a:r>
-              <a:rPr sz="1000" b="1" i="0" spc="100">
-                <a:solidFill>
-                  <a:srgbClr val="256B4A"/>
-                </a:solidFill>
-                <a:latin typeface="Karla"/>
-              </a:rPr>
-              <a:t>DISCUSS</a:t>
             </a:r>
           </a:p>
         </p:txBody>
@@ -8200,11 +7672,11 @@
               </a:spcAft>
             </a:pPr>
             <a:r>
-              <a:rPr sz="3200" b="1" i="0">
+              <a:rPr sz="3200" b="0" i="0">
                 <a:solidFill>
                   <a:srgbClr val="2C3A33"/>
                 </a:solidFill>
-                <a:latin typeface="Libre Caslon Display"/>
+                <a:latin typeface="Georgia"/>
               </a:rPr>
               <a:t>Three questions</a:t>
             </a:r>
@@ -8334,11 +7806,11 @@
               </a:spcAft>
             </a:pPr>
             <a:r>
-              <a:rPr sz="1200" b="1" i="0">
+              <a:rPr sz="1200" b="0" i="0">
                 <a:solidFill>
                   <a:srgbClr val="FFFDF7"/>
                 </a:solidFill>
-                <a:latin typeface="Libre Caslon Display"/>
+                <a:latin typeface="Georgia"/>
               </a:rPr>
               <a:t>1</a:t>
             </a:r>
@@ -8380,7 +7852,7 @@
                 <a:solidFill>
                   <a:srgbClr val="2C3A33"/>
                 </a:solidFill>
-                <a:latin typeface="Karla"/>
+                <a:latin typeface="Calibri"/>
               </a:rPr>
               <a:t>Break is fifteen minutes. If buying something takes ten, what actually works?</a:t>
             </a:r>
@@ -8510,11 +7982,11 @@
               </a:spcAft>
             </a:pPr>
             <a:r>
-              <a:rPr sz="1200" b="1" i="0">
+              <a:rPr sz="1200" b="0" i="0">
                 <a:solidFill>
                   <a:srgbClr val="FFFDF7"/>
                 </a:solidFill>
-                <a:latin typeface="Libre Caslon Display"/>
+                <a:latin typeface="Georgia"/>
               </a:rPr>
               <a:t>2</a:t>
             </a:r>
@@ -8556,7 +8028,7 @@
                 <a:solidFill>
                   <a:srgbClr val="2C3A33"/>
                 </a:solidFill>
-                <a:latin typeface="Karla"/>
+                <a:latin typeface="Calibri"/>
               </a:rPr>
               <a:t>Whose job is it to decide what you eat at break, and what can you do about it yourself?</a:t>
             </a:r>
@@ -8686,11 +8158,11 @@
               </a:spcAft>
             </a:pPr>
             <a:r>
-              <a:rPr sz="1200" b="1" i="0">
+              <a:rPr sz="1200" b="0" i="0">
                 <a:solidFill>
                   <a:srgbClr val="FFFDF7"/>
                 </a:solidFill>
-                <a:latin typeface="Libre Caslon Display"/>
+                <a:latin typeface="Georgia"/>
               </a:rPr>
               <a:t>3</a:t>
             </a:r>
@@ -8732,7 +8204,7 @@
                 <a:solidFill>
                   <a:srgbClr val="2C3A33"/>
                 </a:solidFill>
-                <a:latin typeface="Karla"/>
+                <a:latin typeface="Calibri"/>
               </a:rPr>
               <a:t>What would you have to change the night before to make this easy?</a:t>
             </a:r>
@@ -8774,7 +8246,7 @@
                 <a:solidFill>
                   <a:srgbClr val="256B4A"/>
                 </a:solidFill>
-                <a:latin typeface="Karla"/>
+                <a:latin typeface="Calibri"/>
               </a:rPr>
               <a:t>The third question is the useful one, because most of this gets decided the night before.</a:t>
             </a:r>
@@ -8840,7 +8312,7 @@
                 <a:solidFill>
                   <a:srgbClr val="98A29B"/>
                 </a:solidFill>
-                <a:latin typeface="Karla"/>
+                <a:latin typeface="Calibri"/>
               </a:rPr>
               <a:t>The Pastoral Guide</a:t>
             </a:r>
@@ -8882,7 +8354,7 @@
                 <a:solidFill>
                   <a:srgbClr val="98A29B"/>
                 </a:solidFill>
-                <a:latin typeface="Karla"/>
+                <a:latin typeface="Calibri"/>
               </a:rPr>
               <a:t>15 / 18</a:t>
             </a:r>
@@ -8986,7 +8458,7 @@
                 <a:solidFill>
                   <a:srgbClr val="256B4A"/>
                 </a:solidFill>
-                <a:latin typeface="Karla"/>
+                <a:latin typeface="Calibri"/>
               </a:rPr>
               <a:t>NEXT LESSON</a:t>
             </a:r>
@@ -9074,7 +8546,7 @@
                 <a:solidFill>
                   <a:srgbClr val="256B4A"/>
                 </a:solidFill>
-                <a:latin typeface="Karla"/>
+                <a:latin typeface="Calibri"/>
               </a:rPr>
               <a:t>NEXT WEEK</a:t>
             </a:r>
@@ -9112,11 +8584,11 @@
               </a:spcAft>
             </a:pPr>
             <a:r>
-              <a:rPr sz="3200" b="1" i="0">
+              <a:rPr sz="3200" b="0" i="0">
                 <a:solidFill>
                   <a:srgbClr val="2C3A33"/>
                 </a:solidFill>
-                <a:latin typeface="Libre Caslon Display"/>
+                <a:latin typeface="Georgia"/>
               </a:rPr>
               <a:t>We are making one</a:t>
             </a:r>
@@ -9158,7 +8630,7 @@
                 <a:solidFill>
                   <a:srgbClr val="5F6B64"/>
                 </a:solidFill>
-                <a:latin typeface="Karla"/>
+                <a:latin typeface="Calibri"/>
               </a:rPr>
               <a:t>Your teacher has picked one of these three. All of them hit all four criteria.</a:t>
             </a:r>
@@ -9312,11 +8784,11 @@
               </a:spcAft>
             </a:pPr>
             <a:r>
-              <a:rPr sz="1300" b="1" i="0">
+              <a:rPr sz="1300" b="0" i="0">
                 <a:solidFill>
                   <a:srgbClr val="256B4A"/>
                 </a:solidFill>
-                <a:latin typeface="Libre Caslon Display"/>
+                <a:latin typeface="Georgia"/>
               </a:rPr>
               <a:t>Pinwheel wraps</a:t>
             </a:r>
@@ -9358,7 +8830,7 @@
                 <a:solidFill>
                   <a:srgbClr val="5F6B64"/>
                 </a:solidFill>
-                <a:latin typeface="Karla"/>
+                <a:latin typeface="Calibri"/>
               </a:rPr>
               <a:t>Soft cheese, avocado and grated veg, rolled up.</a:t>
             </a:r>
@@ -9512,11 +8984,11 @@
               </a:spcAft>
             </a:pPr>
             <a:r>
-              <a:rPr sz="1300" b="1" i="0">
+              <a:rPr sz="1300" b="0" i="0">
                 <a:solidFill>
                   <a:srgbClr val="256B4A"/>
                 </a:solidFill>
-                <a:latin typeface="Libre Caslon Display"/>
+                <a:latin typeface="Georgia"/>
               </a:rPr>
               <a:t>Oat and seed balls</a:t>
             </a:r>
@@ -9558,7 +9030,7 @@
                 <a:solidFill>
                   <a:srgbClr val="5F6B64"/>
                 </a:solidFill>
-                <a:latin typeface="Karla"/>
+                <a:latin typeface="Calibri"/>
               </a:rPr>
               <a:t>Oats, banana and seeds. No baking, no nuts.</a:t>
             </a:r>
@@ -9712,11 +9184,11 @@
               </a:spcAft>
             </a:pPr>
             <a:r>
-              <a:rPr sz="1300" b="1" i="0">
+              <a:rPr sz="1300" b="0" i="0">
                 <a:solidFill>
                   <a:srgbClr val="256B4A"/>
                 </a:solidFill>
-                <a:latin typeface="Libre Caslon Display"/>
+                <a:latin typeface="Georgia"/>
               </a:rPr>
               <a:t>Fruit and yoghurt pots</a:t>
             </a:r>
@@ -9758,7 +9230,7 @@
                 <a:solidFill>
                   <a:srgbClr val="5F6B64"/>
                 </a:solidFill>
-                <a:latin typeface="Karla"/>
+                <a:latin typeface="Calibri"/>
               </a:rPr>
               <a:t>Oats, yoghurt, fruit and seeds, layered.</a:t>
             </a:r>
@@ -9800,7 +9272,7 @@
                 <a:solidFill>
                   <a:srgbClr val="256B4A"/>
                 </a:solidFill>
-                <a:latin typeface="Karla"/>
+                <a:latin typeface="Calibri"/>
               </a:rPr>
               <a:t>You do not need to bring anything; the ingredients are provided. Tell your teacher today about any allergy.</a:t>
             </a:r>
@@ -9866,7 +9338,7 @@
                 <a:solidFill>
                   <a:srgbClr val="98A29B"/>
                 </a:solidFill>
-                <a:latin typeface="Karla"/>
+                <a:latin typeface="Calibri"/>
               </a:rPr>
               <a:t>The Pastoral Guide</a:t>
             </a:r>
@@ -9908,7 +9380,7 @@
                 <a:solidFill>
                   <a:srgbClr val="98A29B"/>
                 </a:solidFill>
-                <a:latin typeface="Karla"/>
+                <a:latin typeface="Calibri"/>
               </a:rPr>
               <a:t>16 / 18</a:t>
             </a:r>
@@ -10012,7 +9484,7 @@
                 <a:solidFill>
                   <a:srgbClr val="CBDFD6"/>
                 </a:solidFill>
-                <a:latin typeface="Karla"/>
+                <a:latin typeface="Calibri"/>
               </a:rPr>
               <a:t>IF YOU REMEMBER ONE THING</a:t>
             </a:r>
@@ -10050,21 +9522,21 @@
               </a:spcAft>
             </a:pPr>
             <a:r>
-              <a:rPr sz="3600" b="1" i="0">
+              <a:rPr sz="3600" b="0" i="0">
                 <a:solidFill>
                   <a:srgbClr val="FFFDF7"/>
                 </a:solidFill>
-                <a:latin typeface="Libre Caslon Display"/>
+                <a:latin typeface="Georgia"/>
               </a:rPr>
               <a:t>It is not what you ate.</a:t>
             </a:r>
             <a:br/>
             <a:r>
-              <a:rPr sz="3600" b="1" i="0">
+              <a:rPr sz="3600" b="0" i="0">
                 <a:solidFill>
                   <a:srgbClr val="FFFDF7"/>
                 </a:solidFill>
-                <a:latin typeface="Libre Caslon Display"/>
+                <a:latin typeface="Georgia"/>
               </a:rPr>
               <a:t>It is what you ate it with.</a:t>
             </a:r>
@@ -10150,7 +9622,7 @@
                 <a:solidFill>
                   <a:srgbClr val="CBDFD6"/>
                 </a:solidFill>
-                <a:latin typeface="Karla"/>
+                <a:latin typeface="Calibri"/>
               </a:rPr>
               <a:t>Add protein, fibre or a healthy fat to what you were going to eat anyway.</a:t>
             </a:r>
@@ -10216,7 +9688,7 @@
                 <a:solidFill>
                   <a:srgbClr val="CBDFD6"/>
                 </a:solidFill>
-                <a:latin typeface="Karla"/>
+                <a:latin typeface="Calibri"/>
               </a:rPr>
               <a:t>The Pastoral Guide</a:t>
             </a:r>
@@ -10258,7 +9730,7 @@
                 <a:solidFill>
                   <a:srgbClr val="CBDFD6"/>
                 </a:solidFill>
-                <a:latin typeface="Karla"/>
+                <a:latin typeface="Calibri"/>
               </a:rPr>
               <a:t>17 / 18</a:t>
             </a:r>
@@ -10382,11 +9854,11 @@
               </a:spcAft>
             </a:pPr>
             <a:r>
-              <a:rPr sz="3000" b="1" i="0">
+              <a:rPr sz="3000" b="0" i="0">
                 <a:solidFill>
                   <a:srgbClr val="256B4A"/>
                 </a:solidFill>
-                <a:latin typeface="Libre Caslon Display"/>
+                <a:latin typeface="Georgia"/>
               </a:rPr>
               <a:t>Bring your criteria next week.</a:t>
             </a:r>
@@ -10428,7 +9900,7 @@
                 <a:solidFill>
                   <a:srgbClr val="5F6B64"/>
                 </a:solidFill>
-                <a:latin typeface="Karla"/>
+                <a:latin typeface="Calibri"/>
               </a:rPr>
               <a:t>You are going to build something that meets them,</a:t>
             </a:r>
@@ -10438,7 +9910,7 @@
                 <a:solidFill>
                   <a:srgbClr val="5F6B64"/>
                 </a:solidFill>
-                <a:latin typeface="Karla"/>
+                <a:latin typeface="Calibri"/>
               </a:rPr>
               <a:t>and then find out whether it does.</a:t>
             </a:r>
@@ -10480,7 +9952,7 @@
                 <a:solidFill>
                   <a:srgbClr val="98A29B"/>
                 </a:solidFill>
-                <a:latin typeface="Karla"/>
+                <a:latin typeface="Calibri"/>
               </a:rPr>
               <a:t>Fuel and Focus  ·  Lesson 1 of 3</a:t>
             </a:r>
@@ -10546,7 +10018,7 @@
                 <a:solidFill>
                   <a:srgbClr val="98A29B"/>
                 </a:solidFill>
-                <a:latin typeface="Karla"/>
+                <a:latin typeface="Calibri"/>
               </a:rPr>
               <a:t>The Pastoral Guide</a:t>
             </a:r>
@@ -10588,7 +10060,7 @@
                 <a:solidFill>
                   <a:srgbClr val="98A29B"/>
                 </a:solidFill>
-                <a:latin typeface="Karla"/>
+                <a:latin typeface="Calibri"/>
               </a:rPr>
               <a:t>18 / 18</a:t>
             </a:r>
@@ -10738,7 +10210,7 @@
                 <a:solidFill>
                   <a:srgbClr val="256B4A"/>
                 </a:solidFill>
-                <a:latin typeface="Karla"/>
+                <a:latin typeface="Calibri"/>
               </a:rPr>
               <a:t>TEACHER SLIDE  ·  SKIP IT</a:t>
             </a:r>
@@ -10780,7 +10252,7 @@
                 <a:solidFill>
                   <a:srgbClr val="256B4A"/>
                 </a:solidFill>
-                <a:latin typeface="Karla"/>
+                <a:latin typeface="Calibri"/>
               </a:rPr>
               <a:t>WHERE THIS LESSON SITS</a:t>
             </a:r>
@@ -10818,11 +10290,11 @@
               </a:spcAft>
             </a:pPr>
             <a:r>
-              <a:rPr sz="3100" b="1" i="0">
+              <a:rPr sz="3100" b="0" i="0">
                 <a:solidFill>
                   <a:srgbClr val="2C3A33"/>
                 </a:solidFill>
-                <a:latin typeface="Libre Caslon Display"/>
+                <a:latin typeface="Georgia"/>
               </a:rPr>
               <a:t>Three lessons, one idea</a:t>
             </a:r>
@@ -10952,11 +10424,11 @@
               </a:spcAft>
             </a:pPr>
             <a:r>
-              <a:rPr sz="1500" b="1" i="0">
+              <a:rPr sz="1500" b="0" i="0">
                 <a:solidFill>
                   <a:srgbClr val="FFFDF7"/>
                 </a:solidFill>
-                <a:latin typeface="Libre Caslon Display"/>
+                <a:latin typeface="Georgia"/>
               </a:rPr>
               <a:t>1</a:t>
             </a:r>
@@ -10994,11 +10466,11 @@
               </a:spcAft>
             </a:pPr>
             <a:r>
-              <a:rPr sz="1450" b="1" i="0">
+              <a:rPr sz="1450" b="0" i="0">
                 <a:solidFill>
                   <a:srgbClr val="256B4A"/>
                 </a:solidFill>
-                <a:latin typeface="Libre Caslon Display"/>
+                <a:latin typeface="Georgia"/>
               </a:rPr>
               <a:t>The science</a:t>
             </a:r>
@@ -11040,7 +10512,7 @@
                 <a:solidFill>
                   <a:srgbClr val="5F6B64"/>
                 </a:solidFill>
-                <a:latin typeface="Karla"/>
+                <a:latin typeface="Calibri"/>
               </a:rPr>
               <a:t>Work out what makes a snack last. Write the four criteria.</a:t>
             </a:r>
@@ -11170,11 +10642,11 @@
               </a:spcAft>
             </a:pPr>
             <a:r>
-              <a:rPr sz="1500" b="1" i="0">
+              <a:rPr sz="1500" b="0" i="0">
                 <a:solidFill>
                   <a:srgbClr val="FFFDF7"/>
                 </a:solidFill>
-                <a:latin typeface="Libre Caslon Display"/>
+                <a:latin typeface="Georgia"/>
               </a:rPr>
               <a:t>2</a:t>
             </a:r>
@@ -11212,11 +10684,11 @@
               </a:spcAft>
             </a:pPr>
             <a:r>
-              <a:rPr sz="1450" b="1" i="0">
+              <a:rPr sz="1450" b="0" i="0">
                 <a:solidFill>
                   <a:srgbClr val="256B4A"/>
                 </a:solidFill>
-                <a:latin typeface="Libre Caslon Display"/>
+                <a:latin typeface="Georgia"/>
               </a:rPr>
               <a:t>Make one</a:t>
             </a:r>
@@ -11258,7 +10730,7 @@
                 <a:solidFill>
                   <a:srgbClr val="5F6B64"/>
                 </a:solidFill>
-                <a:latin typeface="Karla"/>
+                <a:latin typeface="Calibri"/>
               </a:rPr>
               <a:t>Build a snack that meets them, then check that it does.</a:t>
             </a:r>
@@ -11388,11 +10860,11 @@
               </a:spcAft>
             </a:pPr>
             <a:r>
-              <a:rPr sz="1500" b="1" i="0">
+              <a:rPr sz="1500" b="0" i="0">
                 <a:solidFill>
                   <a:srgbClr val="FFFDF7"/>
                 </a:solidFill>
-                <a:latin typeface="Libre Caslon Display"/>
+                <a:latin typeface="Georgia"/>
               </a:rPr>
               <a:t>3</a:t>
             </a:r>
@@ -11430,11 +10902,11 @@
               </a:spcAft>
             </a:pPr>
             <a:r>
-              <a:rPr sz="1450" b="1" i="0">
+              <a:rPr sz="1450" b="0" i="0">
                 <a:solidFill>
                   <a:srgbClr val="256B4A"/>
                 </a:solidFill>
-                <a:latin typeface="Libre Caslon Display"/>
+                <a:latin typeface="Georgia"/>
               </a:rPr>
               <a:t>Your own</a:t>
             </a:r>
@@ -11476,7 +10948,7 @@
                 <a:solidFill>
                   <a:srgbClr val="5F6B64"/>
                 </a:solidFill>
-                <a:latin typeface="Karla"/>
+                <a:latin typeface="Calibri"/>
               </a:rPr>
               <a:t>Design a recipe, bring it in, test it against the criteria.</a:t>
             </a:r>
@@ -11518,7 +10990,7 @@
                 <a:solidFill>
                   <a:srgbClr val="256B4A"/>
                 </a:solidFill>
-                <a:latin typeface="Karla"/>
+                <a:latin typeface="Calibri"/>
               </a:rPr>
               <a:t>This one ends with the four criteria written down. Lesson two needs them.</a:t>
             </a:r>
@@ -11584,7 +11056,7 @@
                 <a:solidFill>
                   <a:srgbClr val="98A29B"/>
                 </a:solidFill>
-                <a:latin typeface="Karla"/>
+                <a:latin typeface="Calibri"/>
               </a:rPr>
               <a:t>The Pastoral Guide</a:t>
             </a:r>
@@ -11626,7 +11098,7 @@
                 <a:solidFill>
                   <a:srgbClr val="98A29B"/>
                 </a:solidFill>
-                <a:latin typeface="Karla"/>
+                <a:latin typeface="Calibri"/>
               </a:rPr>
               <a:t>2 / 18</a:t>
             </a:r>
@@ -11730,97 +11202,9 @@
                 <a:solidFill>
                   <a:srgbClr val="CBDFD6"/>
                 </a:solidFill>
-                <a:latin typeface="Karla"/>
+                <a:latin typeface="Calibri"/>
               </a:rPr>
               <a:t>ON YOUR TABLE, RIGHT NOW</a:t>
-            </a:r>
-          </a:p>
-        </p:txBody>
-      </p:sp>
-      <p:sp>
-        <p:nvSpPr>
-          <p:cNvPr id="4" name="Rounded Rectangle 3"/>
-          <p:cNvSpPr/>
-          <p:nvPr/>
-        </p:nvSpPr>
-        <p:spPr>
-          <a:xfrm>
-            <a:off x="6949440" y="530352"/>
-            <a:ext cx="1508760" cy="347472"/>
-          </a:xfrm>
-          <a:prstGeom prst="roundRect">
-            <a:avLst>
-              <a:gd name="adj" fmla="val 50000"/>
-            </a:avLst>
-          </a:prstGeom>
-          <a:solidFill>
-            <a:srgbClr val="FFFDF7"/>
-          </a:solidFill>
-          <a:ln>
-            <a:noFill/>
-          </a:ln>
-          <a:effectLst/>
-        </p:spPr>
-        <p:style>
-          <a:lnRef idx="1">
-            <a:schemeClr val="accent1"/>
-          </a:lnRef>
-          <a:fillRef idx="3">
-            <a:schemeClr val="accent1"/>
-          </a:fillRef>
-          <a:effectRef idx="2">
-            <a:schemeClr val="accent1"/>
-          </a:effectRef>
-          <a:fontRef idx="minor">
-            <a:schemeClr val="lt1"/>
-          </a:fontRef>
-        </p:style>
-        <p:txBody>
-          <a:bodyPr rtlCol="0" anchor="ctr"/>
-          <a:lstStyle/>
-          <a:p>
-            <a:pPr algn="ctr"/>
-          </a:p>
-        </p:txBody>
-      </p:sp>
-      <p:sp>
-        <p:nvSpPr>
-          <p:cNvPr id="5" name="TextBox 4"/>
-          <p:cNvSpPr txBox="1"/>
-          <p:nvPr/>
-        </p:nvSpPr>
-        <p:spPr>
-          <a:xfrm>
-            <a:off x="6949440" y="589788"/>
-            <a:ext cx="1508760" cy="237744"/>
-          </a:xfrm>
-          <a:prstGeom prst="rect">
-            <a:avLst/>
-          </a:prstGeom>
-          <a:noFill/>
-        </p:spPr>
-        <p:txBody>
-          <a:bodyPr wrap="square" lIns="0" rIns="0" tIns="0" bIns="0" anchor="t">
-            <a:spAutoFit/>
-          </a:bodyPr>
-          <a:lstStyle/>
-          <a:p>
-            <a:pPr algn="ctr">
-              <a:lnSpc>
-                <a:spcPct val="125000"/>
-              </a:lnSpc>
-              <a:spcAft>
-                <a:spcPts val="0"/>
-              </a:spcAft>
-            </a:pPr>
-            <a:r>
-              <a:rPr sz="1000" b="1" i="0" spc="100">
-                <a:solidFill>
-                  <a:srgbClr val="256B4A"/>
-                </a:solidFill>
-                <a:latin typeface="Karla"/>
-              </a:rPr>
-              <a:t>RANK THEM</a:t>
             </a:r>
           </a:p>
         </p:txBody>
@@ -11856,11 +11240,11 @@
               </a:spcAft>
             </a:pPr>
             <a:r>
-              <a:rPr sz="2900" b="1" i="0">
+              <a:rPr sz="2900" b="0" i="0">
                 <a:solidFill>
                   <a:srgbClr val="FFFDF7"/>
                 </a:solidFill>
-                <a:latin typeface="Libre Caslon Display"/>
+                <a:latin typeface="Georgia"/>
               </a:rPr>
               <a:t>Which one keeps you going longest?</a:t>
             </a:r>
@@ -11946,11 +11330,11 @@
               </a:spcAft>
             </a:pPr>
             <a:r>
-              <a:rPr sz="1250" b="1" i="0">
+              <a:rPr sz="1250" b="0" i="0">
                 <a:solidFill>
                   <a:srgbClr val="256B4A"/>
                 </a:solidFill>
-                <a:latin typeface="Libre Caslon Display"/>
+                <a:latin typeface="Georgia"/>
               </a:rPr>
               <a:t>A chocolate biscuit</a:t>
             </a:r>
@@ -12036,11 +11420,11 @@
               </a:spcAft>
             </a:pPr>
             <a:r>
-              <a:rPr sz="1250" b="1" i="0">
+              <a:rPr sz="1250" b="0" i="0">
                 <a:solidFill>
                   <a:srgbClr val="256B4A"/>
                 </a:solidFill>
-                <a:latin typeface="Libre Caslon Display"/>
+                <a:latin typeface="Georgia"/>
               </a:rPr>
               <a:t>Toast and peanut butter</a:t>
             </a:r>
@@ -12126,11 +11510,11 @@
               </a:spcAft>
             </a:pPr>
             <a:r>
-              <a:rPr sz="1250" b="1" i="0">
+              <a:rPr sz="1250" b="0" i="0">
                 <a:solidFill>
                   <a:srgbClr val="256B4A"/>
                 </a:solidFill>
-                <a:latin typeface="Libre Caslon Display"/>
+                <a:latin typeface="Georgia"/>
               </a:rPr>
               <a:t>A fizzy drink</a:t>
             </a:r>
@@ -12216,11 +11600,11 @@
               </a:spcAft>
             </a:pPr>
             <a:r>
-              <a:rPr sz="1250" b="1" i="0">
+              <a:rPr sz="1250" b="0" i="0">
                 <a:solidFill>
                   <a:srgbClr val="256B4A"/>
                 </a:solidFill>
-                <a:latin typeface="Libre Caslon Display"/>
+                <a:latin typeface="Georgia"/>
               </a:rPr>
               <a:t>A banana</a:t>
             </a:r>
@@ -12306,11 +11690,11 @@
               </a:spcAft>
             </a:pPr>
             <a:r>
-              <a:rPr sz="1250" b="1" i="0">
+              <a:rPr sz="1250" b="0" i="0">
                 <a:solidFill>
                   <a:srgbClr val="256B4A"/>
                 </a:solidFill>
-                <a:latin typeface="Libre Caslon Display"/>
+                <a:latin typeface="Georgia"/>
               </a:rPr>
               <a:t>A packet of crisps</a:t>
             </a:r>
@@ -12396,11 +11780,11 @@
               </a:spcAft>
             </a:pPr>
             <a:r>
-              <a:rPr sz="1250" b="1" i="0">
+              <a:rPr sz="1250" b="0" i="0">
                 <a:solidFill>
                   <a:srgbClr val="256B4A"/>
                 </a:solidFill>
-                <a:latin typeface="Libre Caslon Display"/>
+                <a:latin typeface="Georgia"/>
               </a:rPr>
               <a:t>Yoghurt and berries</a:t>
             </a:r>
@@ -12442,7 +11826,7 @@
                 <a:solidFill>
                   <a:srgbClr val="CBDFD6"/>
                 </a:solidFill>
-                <a:latin typeface="Karla"/>
+                <a:latin typeface="Calibri"/>
               </a:rPr>
               <a:t>In pairs. Order all six, best at the top. You will not all agree, and that is fine.</a:t>
             </a:r>
@@ -12508,7 +11892,7 @@
                 <a:solidFill>
                   <a:srgbClr val="CBDFD6"/>
                 </a:solidFill>
-                <a:latin typeface="Karla"/>
+                <a:latin typeface="Calibri"/>
               </a:rPr>
               <a:t>The Pastoral Guide</a:t>
             </a:r>
@@ -12550,7 +11934,7 @@
                 <a:solidFill>
                   <a:srgbClr val="CBDFD6"/>
                 </a:solidFill>
-                <a:latin typeface="Karla"/>
+                <a:latin typeface="Calibri"/>
               </a:rPr>
               <a:t>3 / 18</a:t>
             </a:r>
@@ -12654,97 +12038,9 @@
                 <a:solidFill>
                   <a:srgbClr val="256B4A"/>
                 </a:solidFill>
-                <a:latin typeface="Karla"/>
+                <a:latin typeface="Calibri"/>
               </a:rPr>
               <a:t>BEFORE ANYBODY IS TOLD ANYTHING</a:t>
-            </a:r>
-          </a:p>
-        </p:txBody>
-      </p:sp>
-      <p:sp>
-        <p:nvSpPr>
-          <p:cNvPr id="4" name="Rounded Rectangle 3"/>
-          <p:cNvSpPr/>
-          <p:nvPr/>
-        </p:nvSpPr>
-        <p:spPr>
-          <a:xfrm>
-            <a:off x="7086600" y="530352"/>
-            <a:ext cx="1371600" cy="347472"/>
-          </a:xfrm>
-          <a:prstGeom prst="roundRect">
-            <a:avLst>
-              <a:gd name="adj" fmla="val 50000"/>
-            </a:avLst>
-          </a:prstGeom>
-          <a:solidFill>
-            <a:srgbClr val="EEF3F1"/>
-          </a:solidFill>
-          <a:ln>
-            <a:noFill/>
-          </a:ln>
-          <a:effectLst/>
-        </p:spPr>
-        <p:style>
-          <a:lnRef idx="1">
-            <a:schemeClr val="accent1"/>
-          </a:lnRef>
-          <a:fillRef idx="3">
-            <a:schemeClr val="accent1"/>
-          </a:fillRef>
-          <a:effectRef idx="2">
-            <a:schemeClr val="accent1"/>
-          </a:effectRef>
-          <a:fontRef idx="minor">
-            <a:schemeClr val="lt1"/>
-          </a:fontRef>
-        </p:style>
-        <p:txBody>
-          <a:bodyPr rtlCol="0" anchor="ctr"/>
-          <a:lstStyle/>
-          <a:p>
-            <a:pPr algn="ctr"/>
-          </a:p>
-        </p:txBody>
-      </p:sp>
-      <p:sp>
-        <p:nvSpPr>
-          <p:cNvPr id="5" name="TextBox 4"/>
-          <p:cNvSpPr txBox="1"/>
-          <p:nvPr/>
-        </p:nvSpPr>
-        <p:spPr>
-          <a:xfrm>
-            <a:off x="7086600" y="589788"/>
-            <a:ext cx="1371600" cy="237744"/>
-          </a:xfrm>
-          <a:prstGeom prst="rect">
-            <a:avLst/>
-          </a:prstGeom>
-          <a:noFill/>
-        </p:spPr>
-        <p:txBody>
-          <a:bodyPr wrap="square" lIns="0" rIns="0" tIns="0" bIns="0" anchor="t">
-            <a:spAutoFit/>
-          </a:bodyPr>
-          <a:lstStyle/>
-          <a:p>
-            <a:pPr algn="ctr">
-              <a:lnSpc>
-                <a:spcPct val="125000"/>
-              </a:lnSpc>
-              <a:spcAft>
-                <a:spcPts val="0"/>
-              </a:spcAft>
-            </a:pPr>
-            <a:r>
-              <a:rPr sz="1000" b="1" i="0" spc="100">
-                <a:solidFill>
-                  <a:srgbClr val="256B4A"/>
-                </a:solidFill>
-                <a:latin typeface="Karla"/>
-              </a:rPr>
-              <a:t>ARGUE</a:t>
             </a:r>
           </a:p>
         </p:txBody>
@@ -12780,11 +12076,11 @@
               </a:spcAft>
             </a:pPr>
             <a:r>
-              <a:rPr sz="3100" b="1" i="0">
+              <a:rPr sz="3100" b="0" i="0">
                 <a:solidFill>
                   <a:srgbClr val="2C3A33"/>
                 </a:solidFill>
-                <a:latin typeface="Libre Caslon Display"/>
+                <a:latin typeface="Georgia"/>
               </a:rPr>
               <a:t>Who put what at the top?</a:t>
             </a:r>
@@ -12826,7 +12122,7 @@
                 <a:solidFill>
                   <a:srgbClr val="5F6B64"/>
                 </a:solidFill>
-                <a:latin typeface="Karla"/>
+                <a:latin typeface="Calibri"/>
               </a:rPr>
               <a:t>Two pairs who disagree. Both explain. Do not settle it yet.</a:t>
             </a:r>
@@ -12912,21 +12208,21 @@
               </a:spcAft>
             </a:pPr>
             <a:r>
-              <a:rPr sz="1800" b="1" i="0">
+              <a:rPr sz="1800" b="0" i="0">
                 <a:solidFill>
                   <a:srgbClr val="256B4A"/>
                 </a:solidFill>
-                <a:latin typeface="Libre Caslon Display"/>
+                <a:latin typeface="Georgia"/>
               </a:rPr>
               <a:t>The banana and the biscuit have</a:t>
             </a:r>
             <a:br/>
             <a:r>
-              <a:rPr sz="1800" b="1" i="0">
+              <a:rPr sz="1800" b="0" i="0">
                 <a:solidFill>
                   <a:srgbClr val="256B4A"/>
                 </a:solidFill>
-                <a:latin typeface="Libre Caslon Display"/>
+                <a:latin typeface="Georgia"/>
               </a:rPr>
               <a:t>almost the same amount of sugar in them.</a:t>
             </a:r>
@@ -12968,7 +12264,7 @@
                 <a:solidFill>
                   <a:srgbClr val="256B4A"/>
                 </a:solidFill>
-                <a:latin typeface="Karla"/>
+                <a:latin typeface="Calibri"/>
               </a:rPr>
               <a:t>So why does one of them run out an hour later?</a:t>
             </a:r>
@@ -13034,7 +12330,7 @@
                 <a:solidFill>
                   <a:srgbClr val="98A29B"/>
                 </a:solidFill>
-                <a:latin typeface="Karla"/>
+                <a:latin typeface="Calibri"/>
               </a:rPr>
               <a:t>The Pastoral Guide</a:t>
             </a:r>
@@ -13076,7 +12372,7 @@
                 <a:solidFill>
                   <a:srgbClr val="98A29B"/>
                 </a:solidFill>
-                <a:latin typeface="Karla"/>
+                <a:latin typeface="Calibri"/>
               </a:rPr>
               <a:t>4 / 18</a:t>
             </a:r>
@@ -13180,97 +12476,9 @@
                 <a:solidFill>
                   <a:srgbClr val="CBDFD6"/>
                 </a:solidFill>
-                <a:latin typeface="Karla"/>
+                <a:latin typeface="Calibri"/>
               </a:rPr>
               <a:t>WHAT YOUR BRAIN RUNS ON</a:t>
-            </a:r>
-          </a:p>
-        </p:txBody>
-      </p:sp>
-      <p:sp>
-        <p:nvSpPr>
-          <p:cNvPr id="4" name="Rounded Rectangle 3"/>
-          <p:cNvSpPr/>
-          <p:nvPr/>
-        </p:nvSpPr>
-        <p:spPr>
-          <a:xfrm>
-            <a:off x="7086600" y="530352"/>
-            <a:ext cx="1371600" cy="347472"/>
-          </a:xfrm>
-          <a:prstGeom prst="roundRect">
-            <a:avLst>
-              <a:gd name="adj" fmla="val 50000"/>
-            </a:avLst>
-          </a:prstGeom>
-          <a:solidFill>
-            <a:srgbClr val="FFFDF7"/>
-          </a:solidFill>
-          <a:ln>
-            <a:noFill/>
-          </a:ln>
-          <a:effectLst/>
-        </p:spPr>
-        <p:style>
-          <a:lnRef idx="1">
-            <a:schemeClr val="accent1"/>
-          </a:lnRef>
-          <a:fillRef idx="3">
-            <a:schemeClr val="accent1"/>
-          </a:fillRef>
-          <a:effectRef idx="2">
-            <a:schemeClr val="accent1"/>
-          </a:effectRef>
-          <a:fontRef idx="minor">
-            <a:schemeClr val="lt1"/>
-          </a:fontRef>
-        </p:style>
-        <p:txBody>
-          <a:bodyPr rtlCol="0" anchor="ctr"/>
-          <a:lstStyle/>
-          <a:p>
-            <a:pPr algn="ctr"/>
-          </a:p>
-        </p:txBody>
-      </p:sp>
-      <p:sp>
-        <p:nvSpPr>
-          <p:cNvPr id="5" name="TextBox 4"/>
-          <p:cNvSpPr txBox="1"/>
-          <p:nvPr/>
-        </p:nvSpPr>
-        <p:spPr>
-          <a:xfrm>
-            <a:off x="7086600" y="589788"/>
-            <a:ext cx="1371600" cy="237744"/>
-          </a:xfrm>
-          <a:prstGeom prst="rect">
-            <a:avLst/>
-          </a:prstGeom>
-          <a:noFill/>
-        </p:spPr>
-        <p:txBody>
-          <a:bodyPr wrap="square" lIns="0" rIns="0" tIns="0" bIns="0" anchor="t">
-            <a:spAutoFit/>
-          </a:bodyPr>
-          <a:lstStyle/>
-          <a:p>
-            <a:pPr algn="ctr">
-              <a:lnSpc>
-                <a:spcPct val="125000"/>
-              </a:lnSpc>
-              <a:spcAft>
-                <a:spcPts val="0"/>
-              </a:spcAft>
-            </a:pPr>
-            <a:r>
-              <a:rPr sz="1000" b="1" i="0" spc="100">
-                <a:solidFill>
-                  <a:srgbClr val="256B4A"/>
-                </a:solidFill>
-                <a:latin typeface="Karla"/>
-              </a:rPr>
-              <a:t>LEARN</a:t>
             </a:r>
           </a:p>
         </p:txBody>
@@ -13306,21 +12514,21 @@
               </a:spcAft>
             </a:pPr>
             <a:r>
-              <a:rPr sz="2900" b="1" i="0">
+              <a:rPr sz="2900" b="0" i="0">
                 <a:solidFill>
                   <a:srgbClr val="FFFDF7"/>
                 </a:solidFill>
-                <a:latin typeface="Libre Caslon Display"/>
+                <a:latin typeface="Georgia"/>
               </a:rPr>
               <a:t>Your brain is about 2% of you.</a:t>
             </a:r>
             <a:br/>
             <a:r>
-              <a:rPr sz="2900" b="1" i="0">
+              <a:rPr sz="2900" b="0" i="0">
                 <a:solidFill>
                   <a:srgbClr val="FFFDF7"/>
                 </a:solidFill>
-                <a:latin typeface="Libre Caslon Display"/>
+                <a:latin typeface="Georgia"/>
               </a:rPr>
               <a:t>It uses about 20% of your energy.</a:t>
             </a:r>
@@ -13406,7 +12614,7 @@
                 <a:solidFill>
                   <a:srgbClr val="CBDFD6"/>
                 </a:solidFill>
-                <a:latin typeface="Karla"/>
+                <a:latin typeface="Calibri"/>
               </a:rPr>
               <a:t>It runs on glucose, it cannot store much of its own, and it depends on a steady supply arriving in your blood.</a:t>
             </a:r>
@@ -13472,7 +12680,7 @@
                 <a:solidFill>
                   <a:srgbClr val="CBDFD6"/>
                 </a:solidFill>
-                <a:latin typeface="Karla"/>
+                <a:latin typeface="Calibri"/>
               </a:rPr>
               <a:t>The Pastoral Guide</a:t>
             </a:r>
@@ -13514,7 +12722,7 @@
                 <a:solidFill>
                   <a:srgbClr val="CBDFD6"/>
                 </a:solidFill>
-                <a:latin typeface="Karla"/>
+                <a:latin typeface="Calibri"/>
               </a:rPr>
               <a:t>5 / 18</a:t>
             </a:r>
@@ -13618,97 +12826,9 @@
                 <a:solidFill>
                   <a:srgbClr val="256B4A"/>
                 </a:solidFill>
-                <a:latin typeface="Karla"/>
+                <a:latin typeface="Calibri"/>
               </a:rPr>
               <a:t>THE WHOLE LESSON IS THIS SHAPE</a:t>
-            </a:r>
-          </a:p>
-        </p:txBody>
-      </p:sp>
-      <p:sp>
-        <p:nvSpPr>
-          <p:cNvPr id="4" name="Rounded Rectangle 3"/>
-          <p:cNvSpPr/>
-          <p:nvPr/>
-        </p:nvSpPr>
-        <p:spPr>
-          <a:xfrm>
-            <a:off x="7086600" y="530352"/>
-            <a:ext cx="1371600" cy="347472"/>
-          </a:xfrm>
-          <a:prstGeom prst="roundRect">
-            <a:avLst>
-              <a:gd name="adj" fmla="val 50000"/>
-            </a:avLst>
-          </a:prstGeom>
-          <a:solidFill>
-            <a:srgbClr val="EEF3F1"/>
-          </a:solidFill>
-          <a:ln>
-            <a:noFill/>
-          </a:ln>
-          <a:effectLst/>
-        </p:spPr>
-        <p:style>
-          <a:lnRef idx="1">
-            <a:schemeClr val="accent1"/>
-          </a:lnRef>
-          <a:fillRef idx="3">
-            <a:schemeClr val="accent1"/>
-          </a:fillRef>
-          <a:effectRef idx="2">
-            <a:schemeClr val="accent1"/>
-          </a:effectRef>
-          <a:fontRef idx="minor">
-            <a:schemeClr val="lt1"/>
-          </a:fontRef>
-        </p:style>
-        <p:txBody>
-          <a:bodyPr rtlCol="0" anchor="ctr"/>
-          <a:lstStyle/>
-          <a:p>
-            <a:pPr algn="ctr"/>
-          </a:p>
-        </p:txBody>
-      </p:sp>
-      <p:sp>
-        <p:nvSpPr>
-          <p:cNvPr id="5" name="TextBox 4"/>
-          <p:cNvSpPr txBox="1"/>
-          <p:nvPr/>
-        </p:nvSpPr>
-        <p:spPr>
-          <a:xfrm>
-            <a:off x="7086600" y="589788"/>
-            <a:ext cx="1371600" cy="237744"/>
-          </a:xfrm>
-          <a:prstGeom prst="rect">
-            <a:avLst/>
-          </a:prstGeom>
-          <a:noFill/>
-        </p:spPr>
-        <p:txBody>
-          <a:bodyPr wrap="square" lIns="0" rIns="0" tIns="0" bIns="0" anchor="t">
-            <a:spAutoFit/>
-          </a:bodyPr>
-          <a:lstStyle/>
-          <a:p>
-            <a:pPr algn="ctr">
-              <a:lnSpc>
-                <a:spcPct val="125000"/>
-              </a:lnSpc>
-              <a:spcAft>
-                <a:spcPts val="0"/>
-              </a:spcAft>
-            </a:pPr>
-            <a:r>
-              <a:rPr sz="1000" b="1" i="0" spc="100">
-                <a:solidFill>
-                  <a:srgbClr val="256B4A"/>
-                </a:solidFill>
-                <a:latin typeface="Karla"/>
-              </a:rPr>
-              <a:t>LEARN</a:t>
             </a:r>
           </a:p>
         </p:txBody>
@@ -13744,11 +12864,11 @@
               </a:spcAft>
             </a:pPr>
             <a:r>
-              <a:rPr sz="3200" b="1" i="0">
+              <a:rPr sz="3200" b="0" i="0">
                 <a:solidFill>
                   <a:srgbClr val="2C3A33"/>
                 </a:solidFill>
-                <a:latin typeface="Libre Caslon Display"/>
+                <a:latin typeface="Georgia"/>
               </a:rPr>
               <a:t>Fast up, fast down</a:t>
             </a:r>
@@ -13834,11 +12954,11 @@
               </a:spcAft>
             </a:pPr>
             <a:r>
-              <a:rPr sz="1500" b="1" i="0">
+              <a:rPr sz="1500" b="0" i="0">
                 <a:solidFill>
                   <a:srgbClr val="256B4A"/>
                 </a:solidFill>
-                <a:latin typeface="Libre Caslon Display"/>
+                <a:latin typeface="Georgia"/>
               </a:rPr>
               <a:t>The fast one</a:t>
             </a:r>
@@ -13880,7 +13000,7 @@
                 <a:solidFill>
                   <a:srgbClr val="5F6B64"/>
                 </a:solidFill>
-                <a:latin typeface="Karla"/>
+                <a:latin typeface="Calibri"/>
               </a:rPr>
               <a:t>Sugar and white carbs on their own.</a:t>
             </a:r>
@@ -13922,7 +13042,7 @@
                 <a:solidFill>
                   <a:srgbClr val="2C3A33"/>
                 </a:solidFill>
-                <a:latin typeface="Karla"/>
+                <a:latin typeface="Calibri"/>
               </a:rPr>
               <a:t>Glucose rises fast, your body releases a lot of insulin to bring it down, and a couple of hours later you are lower than when you started. That is the two o’clock feeling.</a:t>
             </a:r>
@@ -14008,11 +13128,11 @@
               </a:spcAft>
             </a:pPr>
             <a:r>
-              <a:rPr sz="1500" b="1" i="0">
+              <a:rPr sz="1500" b="0" i="0">
                 <a:solidFill>
                   <a:srgbClr val="256B4A"/>
                 </a:solidFill>
-                <a:latin typeface="Libre Caslon Display"/>
+                <a:latin typeface="Georgia"/>
               </a:rPr>
               <a:t>The slow one</a:t>
             </a:r>
@@ -14054,7 +13174,7 @@
                 <a:solidFill>
                   <a:srgbClr val="5F6B64"/>
                 </a:solidFill>
-                <a:latin typeface="Karla"/>
+                <a:latin typeface="Calibri"/>
               </a:rPr>
               <a:t>The same food with protein, fibre and fat alongside it.</a:t>
             </a:r>
@@ -14096,7 +13216,7 @@
                 <a:solidFill>
                   <a:srgbClr val="2C3A33"/>
                 </a:solidFill>
-                <a:latin typeface="Karla"/>
+                <a:latin typeface="Calibri"/>
               </a:rPr>
               <a:t>The same glucose arrives, just spread over hours instead of minutes. No spike, so no crash.</a:t>
             </a:r>
@@ -14138,7 +13258,7 @@
                 <a:solidFill>
                   <a:srgbClr val="256B4A"/>
                 </a:solidFill>
-                <a:latin typeface="Karla"/>
+                <a:latin typeface="Calibri"/>
               </a:rPr>
               <a:t>Same sugar, delivered differently. That is the only difference.</a:t>
             </a:r>
@@ -14204,7 +13324,7 @@
                 <a:solidFill>
                   <a:srgbClr val="98A29B"/>
                 </a:solidFill>
-                <a:latin typeface="Karla"/>
+                <a:latin typeface="Calibri"/>
               </a:rPr>
               <a:t>The Pastoral Guide</a:t>
             </a:r>
@@ -14246,7 +13366,7 @@
                 <a:solidFill>
                   <a:srgbClr val="98A29B"/>
                 </a:solidFill>
-                <a:latin typeface="Karla"/>
+                <a:latin typeface="Calibri"/>
               </a:rPr>
               <a:t>6 / 18</a:t>
             </a:r>
@@ -14350,97 +13470,9 @@
                 <a:solidFill>
                   <a:srgbClr val="256B4A"/>
                 </a:solidFill>
-                <a:latin typeface="Karla"/>
+                <a:latin typeface="Calibri"/>
               </a:rPr>
               <a:t>WATCH ME DO ONE</a:t>
-            </a:r>
-          </a:p>
-        </p:txBody>
-      </p:sp>
-      <p:sp>
-        <p:nvSpPr>
-          <p:cNvPr id="4" name="Rounded Rectangle 3"/>
-          <p:cNvSpPr/>
-          <p:nvPr/>
-        </p:nvSpPr>
-        <p:spPr>
-          <a:xfrm>
-            <a:off x="7086600" y="530352"/>
-            <a:ext cx="1371600" cy="347472"/>
-          </a:xfrm>
-          <a:prstGeom prst="roundRect">
-            <a:avLst>
-              <a:gd name="adj" fmla="val 50000"/>
-            </a:avLst>
-          </a:prstGeom>
-          <a:solidFill>
-            <a:srgbClr val="EEF3F1"/>
-          </a:solidFill>
-          <a:ln>
-            <a:noFill/>
-          </a:ln>
-          <a:effectLst/>
-        </p:spPr>
-        <p:style>
-          <a:lnRef idx="1">
-            <a:schemeClr val="accent1"/>
-          </a:lnRef>
-          <a:fillRef idx="3">
-            <a:schemeClr val="accent1"/>
-          </a:fillRef>
-          <a:effectRef idx="2">
-            <a:schemeClr val="accent1"/>
-          </a:effectRef>
-          <a:fontRef idx="minor">
-            <a:schemeClr val="lt1"/>
-          </a:fontRef>
-        </p:style>
-        <p:txBody>
-          <a:bodyPr rtlCol="0" anchor="ctr"/>
-          <a:lstStyle/>
-          <a:p>
-            <a:pPr algn="ctr"/>
-          </a:p>
-        </p:txBody>
-      </p:sp>
-      <p:sp>
-        <p:nvSpPr>
-          <p:cNvPr id="5" name="TextBox 4"/>
-          <p:cNvSpPr txBox="1"/>
-          <p:nvPr/>
-        </p:nvSpPr>
-        <p:spPr>
-          <a:xfrm>
-            <a:off x="7086600" y="589788"/>
-            <a:ext cx="1371600" cy="237744"/>
-          </a:xfrm>
-          <a:prstGeom prst="rect">
-            <a:avLst/>
-          </a:prstGeom>
-          <a:noFill/>
-        </p:spPr>
-        <p:txBody>
-          <a:bodyPr wrap="square" lIns="0" rIns="0" tIns="0" bIns="0" anchor="t">
-            <a:spAutoFit/>
-          </a:bodyPr>
-          <a:lstStyle/>
-          <a:p>
-            <a:pPr algn="ctr">
-              <a:lnSpc>
-                <a:spcPct val="125000"/>
-              </a:lnSpc>
-              <a:spcAft>
-                <a:spcPts val="0"/>
-              </a:spcAft>
-            </a:pPr>
-            <a:r>
-              <a:rPr sz="1000" b="1" i="0" spc="100">
-                <a:solidFill>
-                  <a:srgbClr val="256B4A"/>
-                </a:solidFill>
-                <a:latin typeface="Karla"/>
-              </a:rPr>
-              <a:t>MODEL</a:t>
             </a:r>
           </a:p>
         </p:txBody>
@@ -14476,11 +13508,11 @@
               </a:spcAft>
             </a:pPr>
             <a:r>
-              <a:rPr sz="3200" b="1" i="0">
+              <a:rPr sz="3200" b="0" i="0">
                 <a:solidFill>
                   <a:srgbClr val="2C3A33"/>
                 </a:solidFill>
-                <a:latin typeface="Libre Caslon Display"/>
+                <a:latin typeface="Georgia"/>
               </a:rPr>
               <a:t>Trace the biscuit</a:t>
             </a:r>
@@ -14566,7 +13598,7 @@
                 <a:solidFill>
                   <a:srgbClr val="98A29B"/>
                 </a:solidFill>
-                <a:latin typeface="Karla"/>
+                <a:latin typeface="Calibri"/>
               </a:rPr>
               <a:t>Normal</a:t>
             </a:r>
@@ -14696,7 +13728,7 @@
                 <a:solidFill>
                   <a:srgbClr val="5F6B64"/>
                 </a:solidFill>
-                <a:latin typeface="Karla"/>
+                <a:latin typeface="Calibri"/>
               </a:rPr>
               <a:t>BLOOD SUGAR</a:t>
             </a:r>
@@ -14738,7 +13770,7 @@
                 <a:solidFill>
                   <a:srgbClr val="5F6B64"/>
                 </a:solidFill>
-                <a:latin typeface="Karla"/>
+                <a:latin typeface="Calibri"/>
               </a:rPr>
               <a:t>TIME</a:t>
             </a:r>
@@ -15299,7 +14331,7 @@
                 <a:solidFill>
                   <a:srgbClr val="256B4A"/>
                 </a:solidFill>
-                <a:latin typeface="Karla"/>
+                <a:latin typeface="Calibri"/>
               </a:rPr>
               <a:t>11:00</a:t>
             </a:r>
@@ -15385,7 +14417,7 @@
                 <a:solidFill>
                   <a:srgbClr val="256B4A"/>
                 </a:solidFill>
-                <a:latin typeface="Karla"/>
+                <a:latin typeface="Calibri"/>
               </a:rPr>
               <a:t>12:00</a:t>
             </a:r>
@@ -15471,7 +14503,7 @@
                 <a:solidFill>
                   <a:srgbClr val="256B4A"/>
                 </a:solidFill>
-                <a:latin typeface="Karla"/>
+                <a:latin typeface="Calibri"/>
               </a:rPr>
               <a:t>13:00</a:t>
             </a:r>
@@ -15557,7 +14589,7 @@
                 <a:solidFill>
                   <a:srgbClr val="256B4A"/>
                 </a:solidFill>
-                <a:latin typeface="Karla"/>
+                <a:latin typeface="Calibri"/>
               </a:rPr>
               <a:t>14:30</a:t>
             </a:r>
@@ -15599,7 +14631,7 @@
                 <a:solidFill>
                   <a:srgbClr val="256B4A"/>
                 </a:solidFill>
-                <a:latin typeface="Karla"/>
+                <a:latin typeface="Calibri"/>
               </a:rPr>
               <a:t>Feels great</a:t>
             </a:r>
@@ -15641,7 +14673,7 @@
                 <a:solidFill>
                   <a:srgbClr val="256B4A"/>
                 </a:solidFill>
-                <a:latin typeface="Karla"/>
+                <a:latin typeface="Calibri"/>
               </a:rPr>
               <a:t>Lower than when</a:t>
             </a:r>
@@ -15651,7 +14683,7 @@
                 <a:solidFill>
                   <a:srgbClr val="256B4A"/>
                 </a:solidFill>
-                <a:latin typeface="Karla"/>
+                <a:latin typeface="Calibri"/>
               </a:rPr>
               <a:t>you started</a:t>
             </a:r>
@@ -15693,7 +14725,7 @@
                 <a:solidFill>
                   <a:srgbClr val="256B4A"/>
                 </a:solidFill>
-                <a:latin typeface="Karla"/>
+                <a:latin typeface="Calibri"/>
               </a:rPr>
               <a:t>Ask what happens next at every point before you move to it.</a:t>
             </a:r>
@@ -15759,7 +14791,7 @@
                 <a:solidFill>
                   <a:srgbClr val="98A29B"/>
                 </a:solidFill>
-                <a:latin typeface="Karla"/>
+                <a:latin typeface="Calibri"/>
               </a:rPr>
               <a:t>The Pastoral Guide</a:t>
             </a:r>
@@ -15801,7 +14833,7 @@
                 <a:solidFill>
                   <a:srgbClr val="98A29B"/>
                 </a:solidFill>
-                <a:latin typeface="Karla"/>
+                <a:latin typeface="Calibri"/>
               </a:rPr>
               <a:t>7 / 18</a:t>
             </a:r>
@@ -15905,97 +14937,9 @@
                 <a:solidFill>
                   <a:srgbClr val="256B4A"/>
                 </a:solidFill>
-                <a:latin typeface="Karla"/>
+                <a:latin typeface="Calibri"/>
               </a:rPr>
               <a:t>NOW THE ROOM DOES TWO</a:t>
-            </a:r>
-          </a:p>
-        </p:txBody>
-      </p:sp>
-      <p:sp>
-        <p:nvSpPr>
-          <p:cNvPr id="4" name="Rounded Rectangle 3"/>
-          <p:cNvSpPr/>
-          <p:nvPr/>
-        </p:nvSpPr>
-        <p:spPr>
-          <a:xfrm>
-            <a:off x="7050024" y="530352"/>
-            <a:ext cx="1408176" cy="347472"/>
-          </a:xfrm>
-          <a:prstGeom prst="roundRect">
-            <a:avLst>
-              <a:gd name="adj" fmla="val 50000"/>
-            </a:avLst>
-          </a:prstGeom>
-          <a:solidFill>
-            <a:srgbClr val="EEF3F1"/>
-          </a:solidFill>
-          <a:ln>
-            <a:noFill/>
-          </a:ln>
-          <a:effectLst/>
-        </p:spPr>
-        <p:style>
-          <a:lnRef idx="1">
-            <a:schemeClr val="accent1"/>
-          </a:lnRef>
-          <a:fillRef idx="3">
-            <a:schemeClr val="accent1"/>
-          </a:fillRef>
-          <a:effectRef idx="2">
-            <a:schemeClr val="accent1"/>
-          </a:effectRef>
-          <a:fontRef idx="minor">
-            <a:schemeClr val="lt1"/>
-          </a:fontRef>
-        </p:style>
-        <p:txBody>
-          <a:bodyPr rtlCol="0" anchor="ctr"/>
-          <a:lstStyle/>
-          <a:p>
-            <a:pPr algn="ctr"/>
-          </a:p>
-        </p:txBody>
-      </p:sp>
-      <p:sp>
-        <p:nvSpPr>
-          <p:cNvPr id="5" name="TextBox 4"/>
-          <p:cNvSpPr txBox="1"/>
-          <p:nvPr/>
-        </p:nvSpPr>
-        <p:spPr>
-          <a:xfrm>
-            <a:off x="7050024" y="589788"/>
-            <a:ext cx="1408176" cy="237744"/>
-          </a:xfrm>
-          <a:prstGeom prst="rect">
-            <a:avLst/>
-          </a:prstGeom>
-          <a:noFill/>
-        </p:spPr>
-        <p:txBody>
-          <a:bodyPr wrap="square" lIns="0" rIns="0" tIns="0" bIns="0" anchor="t">
-            <a:spAutoFit/>
-          </a:bodyPr>
-          <a:lstStyle/>
-          <a:p>
-            <a:pPr algn="ctr">
-              <a:lnSpc>
-                <a:spcPct val="125000"/>
-              </a:lnSpc>
-              <a:spcAft>
-                <a:spcPts val="0"/>
-              </a:spcAft>
-            </a:pPr>
-            <a:r>
-              <a:rPr sz="1000" b="1" i="0" spc="100">
-                <a:solidFill>
-                  <a:srgbClr val="256B4A"/>
-                </a:solidFill>
-                <a:latin typeface="Karla"/>
-              </a:rPr>
-              <a:t>TOGETHER</a:t>
             </a:r>
           </a:p>
         </p:txBody>
@@ -16031,11 +14975,11 @@
               </a:spcAft>
             </a:pPr>
             <a:r>
-              <a:rPr sz="3200" b="1" i="0">
+              <a:rPr sz="3200" b="0" i="0">
                 <a:solidFill>
                   <a:srgbClr val="2C3A33"/>
                 </a:solidFill>
-                <a:latin typeface="Libre Caslon Display"/>
+                <a:latin typeface="Georgia"/>
               </a:rPr>
               <a:t>Trace these</a:t>
             </a:r>
@@ -16077,7 +15021,7 @@
                 <a:solidFill>
                   <a:srgbClr val="5F6B64"/>
                 </a:solidFill>
-                <a:latin typeface="Karla"/>
+                <a:latin typeface="Calibri"/>
               </a:rPr>
               <a:t>Fast or slow? And what is in it that decides?</a:t>
             </a:r>
@@ -16207,11 +15151,11 @@
               </a:spcAft>
             </a:pPr>
             <a:r>
-              <a:rPr sz="1400" b="1" i="0">
+              <a:rPr sz="1400" b="0" i="0">
                 <a:solidFill>
                   <a:srgbClr val="FFFDF7"/>
                 </a:solidFill>
-                <a:latin typeface="Libre Caslon Display"/>
+                <a:latin typeface="Georgia"/>
               </a:rPr>
               <a:t>1</a:t>
             </a:r>
@@ -16249,11 +15193,11 @@
               </a:spcAft>
             </a:pPr>
             <a:r>
-              <a:rPr sz="1500" b="1" i="0">
+              <a:rPr sz="1500" b="0" i="0">
                 <a:solidFill>
                   <a:srgbClr val="256B4A"/>
                 </a:solidFill>
-                <a:latin typeface="Libre Caslon Display"/>
+                <a:latin typeface="Georgia"/>
               </a:rPr>
               <a:t>Toast and peanut butter</a:t>
             </a:r>
@@ -16295,7 +15239,7 @@
                 <a:solidFill>
                   <a:srgbClr val="5F6B64"/>
                 </a:solidFill>
-                <a:latin typeface="Karla"/>
+                <a:latin typeface="Calibri"/>
               </a:rPr>
               <a:t>Bread on its own would be fast. What changes it?</a:t>
             </a:r>
@@ -16425,11 +15369,11 @@
               </a:spcAft>
             </a:pPr>
             <a:r>
-              <a:rPr sz="1400" b="1" i="0">
+              <a:rPr sz="1400" b="0" i="0">
                 <a:solidFill>
                   <a:srgbClr val="FFFDF7"/>
                 </a:solidFill>
-                <a:latin typeface="Libre Caslon Display"/>
+                <a:latin typeface="Georgia"/>
               </a:rPr>
               <a:t>2</a:t>
             </a:r>
@@ -16467,11 +15411,11 @@
               </a:spcAft>
             </a:pPr>
             <a:r>
-              <a:rPr sz="1500" b="1" i="0">
+              <a:rPr sz="1500" b="0" i="0">
                 <a:solidFill>
                   <a:srgbClr val="256B4A"/>
                 </a:solidFill>
-                <a:latin typeface="Libre Caslon Display"/>
+                <a:latin typeface="Georgia"/>
               </a:rPr>
               <a:t>A fizzy drink</a:t>
             </a:r>
@@ -16513,7 +15457,7 @@
                 <a:solidFill>
                   <a:srgbClr val="5F6B64"/>
                 </a:solidFill>
-                <a:latin typeface="Karla"/>
+                <a:latin typeface="Calibri"/>
               </a:rPr>
               <a:t>Nothing to slow it down at all. What does the curve do?</a:t>
             </a:r>
@@ -16555,7 +15499,7 @@
                 <a:solidFill>
                   <a:srgbClr val="256B4A"/>
                 </a:solidFill>
-                <a:latin typeface="Karla"/>
+                <a:latin typeface="Calibri"/>
               </a:rPr>
               <a:t>Every answer comes back to the same four things, which are on the next slide.</a:t>
             </a:r>
@@ -16621,7 +15565,7 @@
                 <a:solidFill>
                   <a:srgbClr val="98A29B"/>
                 </a:solidFill>
-                <a:latin typeface="Karla"/>
+                <a:latin typeface="Calibri"/>
               </a:rPr>
               <a:t>The Pastoral Guide</a:t>
             </a:r>
@@ -16663,7 +15607,7 @@
                 <a:solidFill>
                   <a:srgbClr val="98A29B"/>
                 </a:solidFill>
-                <a:latin typeface="Karla"/>
+                <a:latin typeface="Calibri"/>
               </a:rPr>
               <a:t>8 / 18</a:t>
             </a:r>
@@ -16767,97 +15711,9 @@
                 <a:solidFill>
                   <a:srgbClr val="CBDFD6"/>
                 </a:solidFill>
-                <a:latin typeface="Karla"/>
+                <a:latin typeface="Calibri"/>
               </a:rPr>
               <a:t>THIS IS THE PART YOU WRITE DOWN</a:t>
-            </a:r>
-          </a:p>
-        </p:txBody>
-      </p:sp>
-      <p:sp>
-        <p:nvSpPr>
-          <p:cNvPr id="4" name="Rounded Rectangle 3"/>
-          <p:cNvSpPr/>
-          <p:nvPr/>
-        </p:nvSpPr>
-        <p:spPr>
-          <a:xfrm>
-            <a:off x="7086600" y="530352"/>
-            <a:ext cx="1371600" cy="347472"/>
-          </a:xfrm>
-          <a:prstGeom prst="roundRect">
-            <a:avLst>
-              <a:gd name="adj" fmla="val 50000"/>
-            </a:avLst>
-          </a:prstGeom>
-          <a:solidFill>
-            <a:srgbClr val="FFFDF7"/>
-          </a:solidFill>
-          <a:ln>
-            <a:noFill/>
-          </a:ln>
-          <a:effectLst/>
-        </p:spPr>
-        <p:style>
-          <a:lnRef idx="1">
-            <a:schemeClr val="accent1"/>
-          </a:lnRef>
-          <a:fillRef idx="3">
-            <a:schemeClr val="accent1"/>
-          </a:fillRef>
-          <a:effectRef idx="2">
-            <a:schemeClr val="accent1"/>
-          </a:effectRef>
-          <a:fontRef idx="minor">
-            <a:schemeClr val="lt1"/>
-          </a:fontRef>
-        </p:style>
-        <p:txBody>
-          <a:bodyPr rtlCol="0" anchor="ctr"/>
-          <a:lstStyle/>
-          <a:p>
-            <a:pPr algn="ctr"/>
-          </a:p>
-        </p:txBody>
-      </p:sp>
-      <p:sp>
-        <p:nvSpPr>
-          <p:cNvPr id="5" name="TextBox 4"/>
-          <p:cNvSpPr txBox="1"/>
-          <p:nvPr/>
-        </p:nvSpPr>
-        <p:spPr>
-          <a:xfrm>
-            <a:off x="7086600" y="589788"/>
-            <a:ext cx="1371600" cy="237744"/>
-          </a:xfrm>
-          <a:prstGeom prst="rect">
-            <a:avLst/>
-          </a:prstGeom>
-          <a:noFill/>
-        </p:spPr>
-        <p:txBody>
-          <a:bodyPr wrap="square" lIns="0" rIns="0" tIns="0" bIns="0" anchor="t">
-            <a:spAutoFit/>
-          </a:bodyPr>
-          <a:lstStyle/>
-          <a:p>
-            <a:pPr algn="ctr">
-              <a:lnSpc>
-                <a:spcPct val="125000"/>
-              </a:lnSpc>
-              <a:spcAft>
-                <a:spcPts val="0"/>
-              </a:spcAft>
-            </a:pPr>
-            <a:r>
-              <a:rPr sz="1000" b="1" i="0" spc="100">
-                <a:solidFill>
-                  <a:srgbClr val="256B4A"/>
-                </a:solidFill>
-                <a:latin typeface="Karla"/>
-              </a:rPr>
-              <a:t>LEARN</a:t>
             </a:r>
           </a:p>
         </p:txBody>
@@ -16893,11 +15749,11 @@
               </a:spcAft>
             </a:pPr>
             <a:r>
-              <a:rPr sz="3200" b="1" i="0">
+              <a:rPr sz="3200" b="0" i="0">
                 <a:solidFill>
                   <a:srgbClr val="FFFDF7"/>
                 </a:solidFill>
-                <a:latin typeface="Libre Caslon Display"/>
+                <a:latin typeface="Georgia"/>
               </a:rPr>
               <a:t>What makes a snack last</a:t>
             </a:r>
@@ -17027,11 +15883,11 @@
               </a:spcAft>
             </a:pPr>
             <a:r>
-              <a:rPr sz="1300" b="1" i="0">
+              <a:rPr sz="1300" b="0" i="0">
                 <a:solidFill>
                   <a:srgbClr val="FFFDF7"/>
                 </a:solidFill>
-                <a:latin typeface="Libre Caslon Display"/>
+                <a:latin typeface="Georgia"/>
               </a:rPr>
               <a:t>1</a:t>
             </a:r>
@@ -17069,11 +15925,11 @@
               </a:spcAft>
             </a:pPr>
             <a:r>
-              <a:rPr sz="1500" b="1" i="0">
+              <a:rPr sz="1500" b="0" i="0">
                 <a:solidFill>
                   <a:srgbClr val="256B4A"/>
                 </a:solidFill>
-                <a:latin typeface="Libre Caslon Display"/>
+                <a:latin typeface="Georgia"/>
               </a:rPr>
               <a:t>Protein</a:t>
             </a:r>
@@ -17115,7 +15971,7 @@
                 <a:solidFill>
                   <a:srgbClr val="5F6B64"/>
                 </a:solidFill>
-                <a:latin typeface="Karla"/>
+                <a:latin typeface="Calibri"/>
               </a:rPr>
               <a:t>Slows the whole thing down, and keeps you full.</a:t>
             </a:r>
@@ -17245,11 +16101,11 @@
               </a:spcAft>
             </a:pPr>
             <a:r>
-              <a:rPr sz="1300" b="1" i="0">
+              <a:rPr sz="1300" b="0" i="0">
                 <a:solidFill>
                   <a:srgbClr val="FFFDF7"/>
                 </a:solidFill>
-                <a:latin typeface="Libre Caslon Display"/>
+                <a:latin typeface="Georgia"/>
               </a:rPr>
               <a:t>2</a:t>
             </a:r>
@@ -17287,11 +16143,11 @@
               </a:spcAft>
             </a:pPr>
             <a:r>
-              <a:rPr sz="1500" b="1" i="0">
+              <a:rPr sz="1500" b="0" i="0">
                 <a:solidFill>
                   <a:srgbClr val="256B4A"/>
                 </a:solidFill>
-                <a:latin typeface="Libre Caslon Display"/>
+                <a:latin typeface="Georgia"/>
               </a:rPr>
               <a:t>Fibre</a:t>
             </a:r>
@@ -17333,7 +16189,7 @@
                 <a:solidFill>
                   <a:srgbClr val="5F6B64"/>
                 </a:solidFill>
-                <a:latin typeface="Karla"/>
+                <a:latin typeface="Calibri"/>
               </a:rPr>
               <a:t>Slows the food down in your gut, so the glucose arrives gradually.</a:t>
             </a:r>
@@ -17463,11 +16319,11 @@
               </a:spcAft>
             </a:pPr>
             <a:r>
-              <a:rPr sz="1300" b="1" i="0">
+              <a:rPr sz="1300" b="0" i="0">
                 <a:solidFill>
                   <a:srgbClr val="FFFDF7"/>
                 </a:solidFill>
-                <a:latin typeface="Libre Caslon Display"/>
+                <a:latin typeface="Georgia"/>
               </a:rPr>
               <a:t>3</a:t>
             </a:r>
@@ -17505,11 +16361,11 @@
               </a:spcAft>
             </a:pPr>
             <a:r>
-              <a:rPr sz="1500" b="1" i="0">
+              <a:rPr sz="1500" b="0" i="0">
                 <a:solidFill>
                   <a:srgbClr val="256B4A"/>
                 </a:solidFill>
-                <a:latin typeface="Libre Caslon Display"/>
+                <a:latin typeface="Georgia"/>
               </a:rPr>
               <a:t>A slow carb</a:t>
             </a:r>
@@ -17551,7 +16407,7 @@
                 <a:solidFill>
                   <a:srgbClr val="5F6B64"/>
                 </a:solidFill>
-                <a:latin typeface="Karla"/>
+                <a:latin typeface="Calibri"/>
               </a:rPr>
               <a:t>Oats, wholegrain or whole fruit. Not white and not sugary.</a:t>
             </a:r>
@@ -17681,11 +16537,11 @@
               </a:spcAft>
             </a:pPr>
             <a:r>
-              <a:rPr sz="1300" b="1" i="0">
+              <a:rPr sz="1300" b="0" i="0">
                 <a:solidFill>
                   <a:srgbClr val="FFFDF7"/>
                 </a:solidFill>
-                <a:latin typeface="Libre Caslon Display"/>
+                <a:latin typeface="Georgia"/>
               </a:rPr>
               <a:t>4</a:t>
             </a:r>
@@ -17723,11 +16579,11 @@
               </a:spcAft>
             </a:pPr>
             <a:r>
-              <a:rPr sz="1500" b="1" i="0">
+              <a:rPr sz="1500" b="0" i="0">
                 <a:solidFill>
                   <a:srgbClr val="256B4A"/>
                 </a:solidFill>
-                <a:latin typeface="Libre Caslon Display"/>
+                <a:latin typeface="Georgia"/>
               </a:rPr>
               <a:t>Healthy fats</a:t>
             </a:r>
@@ -17769,7 +16625,7 @@
                 <a:solidFill>
                   <a:srgbClr val="5F6B64"/>
                 </a:solidFill>
-                <a:latin typeface="Karla"/>
+                <a:latin typeface="Calibri"/>
               </a:rPr>
               <a:t>Slows the stomach down, and carries the most energy per gram. Seeds, nuts, avocado.</a:t>
             </a:r>
@@ -17811,7 +16667,7 @@
                 <a:solidFill>
                   <a:srgbClr val="FFFDF7"/>
                 </a:solidFill>
-                <a:latin typeface="Karla"/>
+                <a:latin typeface="Calibri"/>
               </a:rPr>
               <a:t>Two out of four helps. All four gets you to lunch.</a:t>
             </a:r>
@@ -17877,7 +16733,7 @@
                 <a:solidFill>
                   <a:srgbClr val="CBDFD6"/>
                 </a:solidFill>
-                <a:latin typeface="Karla"/>
+                <a:latin typeface="Calibri"/>
               </a:rPr>
               <a:t>The Pastoral Guide</a:t>
             </a:r>
@@ -17919,7 +16775,7 @@
                 <a:solidFill>
                   <a:srgbClr val="CBDFD6"/>
                 </a:solidFill>
-                <a:latin typeface="Karla"/>
+                <a:latin typeface="Calibri"/>
               </a:rPr>
               <a:t>9 / 18</a:t>
             </a:r>
